--- a/docs/gateway-manual/Flora-Gateway-User-Manual.pptx
+++ b/docs/gateway-manual/Flora-Gateway-User-Manual.pptx
@@ -37,9 +37,15 @@
     <p:sldId id="285" r:id="rId31"/>
     <p:sldId id="286" r:id="rId32"/>
     <p:sldId id="287" r:id="rId33"/>
+    <p:sldId id="288" r:id="rId34"/>
+    <p:sldId id="289" r:id="rId35"/>
+    <p:sldId id="290" r:id="rId36"/>
+    <p:sldId id="291" r:id="rId37"/>
+    <p:sldId id="292" r:id="rId38"/>
+    <p:sldId id="293" r:id="rId39"/>
   </p:sldIdLst>
   <p:notesMasterIdLst>
-    <p:notesMasterId r:id="rId34"/>
+    <p:notesMasterId r:id="rId40"/>
   </p:notesMasterIdLst>
   <p:sldSz cx="9144000" cy="5143500"/>
   <p:notesSz cx="5143500" cy="9144000"/>
@@ -138,27 +144,27 @@
   <p:extLst>
     <p:ext uri="{521415D9-36F7-43E2-AB2F-B90AF26B5E84}">
       <p14:sectionLst xmlns:p14="http://schemas.microsoft.com/office/powerpoint/2010/main">
-        <p14:section name="Introduction" id="{c0a00247-7766-cc67-f3da-6af3e54c9a45}">
+        <p14:section name="Introduction" id="{1d8bfc9e-114d-0d0d-003b-3265f7dd131d}">
           <p14:sldIdLst>
             <p14:sldId id="256"/>
             <p14:sldId id="257"/>
             <p14:sldId id="258"/>
           </p14:sldIdLst>
         </p14:section>
-        <p14:section name="Overview" id="{a2dc9c4d-45db-6274-8df1-e739ecf344b1}">
+        <p14:section name="Overview" id="{200caa24-37be-6eb6-9094-d7cca2ff31ad}">
           <p14:sldIdLst>
             <p14:sldId id="259"/>
             <p14:sldId id="260"/>
             <p14:sldId id="261"/>
           </p14:sldIdLst>
         </p14:section>
-        <p14:section name="Technology stack" id="{1b0b0c7c-8241-beef-c5b4-701f19049bb6}">
+        <p14:section name="Technology stack" id="{f06085d1-8706-404f-d17d-7ff56382eec1}">
           <p14:sldIdLst>
             <p14:sldId id="262"/>
             <p14:sldId id="263"/>
           </p14:sldIdLst>
         </p14:section>
-        <p14:section name="Using the console" id="{b082e664-ef11-ecdb-7cf1-0438a6a0fcaf}">
+        <p14:section name="Using the console" id="{559fe4be-77c6-7223-3661-c01941c4d887}">
           <p14:sldIdLst>
             <p14:sldId id="264"/>
             <p14:sldId id="265"/>
@@ -168,7 +174,7 @@
             <p14:sldId id="269"/>
           </p14:sldIdLst>
         </p14:section>
-        <p14:section name="Canopy integration" id="{b4042689-6d11-ddf4-bd86-a9cb6e7eda80}">
+        <p14:section name="Canopy integration" id="{3dc71a0e-db90-9847-2e96-d38a88f9bba0}">
           <p14:sldIdLst>
             <p14:sldId id="270"/>
             <p14:sldId id="271"/>
@@ -177,25 +183,35 @@
             <p14:sldId id="274"/>
           </p14:sldIdLst>
         </p14:section>
-        <p14:section name="Data structures" id="{40b65b7c-b485-592f-e3ee-bed8a62f07d5}">
+        <p14:section name="Devices at Canopy" id="{b9f8698b-13e0-7047-5144-1769b916355a}">
           <p14:sldIdLst>
             <p14:sldId id="275"/>
             <p14:sldId id="276"/>
             <p14:sldId id="277"/>
             <p14:sldId id="278"/>
+          </p14:sldIdLst>
+        </p14:section>
+        <p14:section name="Data structures" id="{d2d127b5-cf4f-1cb8-6d51-cfb650bb7b44}">
+          <p14:sldIdLst>
             <p14:sldId id="279"/>
             <p14:sldId id="280"/>
             <p14:sldId id="281"/>
             <p14:sldId id="282"/>
-          </p14:sldIdLst>
-        </p14:section>
-        <p14:section name="Reference" id="{865bc8cc-23ca-04ff-14d0-278ad7568f45}">
-          <p14:sldIdLst>
             <p14:sldId id="283"/>
             <p14:sldId id="284"/>
             <p14:sldId id="285"/>
             <p14:sldId id="286"/>
             <p14:sldId id="287"/>
+            <p14:sldId id="288"/>
+          </p14:sldIdLst>
+        </p14:section>
+        <p14:section name="Reference" id="{0a7e1664-7ed0-be88-b0ef-acd5c1173eaa}">
+          <p14:sldIdLst>
+            <p14:sldId id="289"/>
+            <p14:sldId id="290"/>
+            <p14:sldId id="291"/>
+            <p14:sldId id="292"/>
+            <p14:sldId id="293"/>
           </p14:sldIdLst>
         </p14:section>
       </p14:sectionLst>
@@ -2826,6 +2842,534 @@
             <a:fld id="{F7021451-1387-4CA6-816F-3879F97B5CBC}" type="slidenum">
               <a:rPr lang="en-US"/>
               <a:t>32</a:t>
+            </a:fld>
+            <a:endParaRPr lang="en-US"/>
+          </a:p>
+        </p:txBody>
+      </p:sp>
+    </p:spTree>
+    <p:extLst>
+      <p:ext uri="{BB962C8B-B14F-4D97-AF65-F5344CB8AC3E}">
+        <p14:creationId xmlns:p14="http://schemas.microsoft.com/office/powerpoint/2010/main" val="1024086991"/>
+      </p:ext>
+    </p:extLst>
+  </p:cSld>
+  <p:clrMapOvr>
+    <a:masterClrMapping/>
+  </p:clrMapOvr>
+</p:notes>
+</file>
+
+<file path=ppt/notesSlides/notesSlide33.xml><?xml version="1.0" encoding="utf-8"?>
+<p:notes xmlns:a="http://schemas.openxmlformats.org/drawingml/2006/main" xmlns:r="http://schemas.openxmlformats.org/officeDocument/2006/relationships" xmlns:p="http://schemas.openxmlformats.org/presentationml/2006/main">
+  <p:cSld>
+    <p:spTree>
+      <p:nvGrpSpPr>
+        <p:cNvPr id="1" name=""/>
+        <p:cNvGrpSpPr/>
+        <p:nvPr/>
+      </p:nvGrpSpPr>
+      <p:grpSpPr>
+        <a:xfrm>
+          <a:off x="0" y="0"/>
+          <a:ext cx="0" cy="0"/>
+          <a:chOff x="0" y="0"/>
+          <a:chExt cx="0" cy="0"/>
+        </a:xfrm>
+      </p:grpSpPr>
+      <p:sp>
+        <p:nvSpPr>
+          <p:cNvPr id="2" name="Slide Image Placeholder 1"/>
+          <p:cNvSpPr>
+            <a:spLocks noGrp="1" noRot="1" noChangeAspect="1"/>
+          </p:cNvSpPr>
+          <p:nvPr>
+            <p:ph type="sldImg"/>
+          </p:nvPr>
+        </p:nvSpPr>
+        <p:spPr/>
+      </p:sp>
+      <p:sp>
+        <p:nvSpPr>
+          <p:cNvPr id="3" name="Notes Placeholder 2"/>
+          <p:cNvSpPr>
+            <a:spLocks noGrp="1"/>
+          </p:cNvSpPr>
+          <p:nvPr>
+            <p:ph type="body" idx="1"/>
+          </p:nvPr>
+        </p:nvSpPr>
+        <p:spPr/>
+        <p:txBody>
+          <a:bodyPr/>
+          <a:lstStyle/>
+          <a:p>
+            <a:r>
+              <a:rPr lang="en-US" dirty="0"/>
+              <a:t/>
+            </a:r>
+            <a:endParaRPr lang="en-US" dirty="0"/>
+          </a:p>
+        </p:txBody>
+      </p:sp>
+      <p:sp>
+        <p:nvSpPr>
+          <p:cNvPr id="4" name="Slide Number Placeholder 3"/>
+          <p:cNvSpPr>
+            <a:spLocks noGrp="1"/>
+          </p:cNvSpPr>
+          <p:nvPr>
+            <p:ph type="sldNum" sz="quarter" idx="10"/>
+          </p:nvPr>
+        </p:nvSpPr>
+        <p:spPr/>
+        <p:txBody>
+          <a:bodyPr/>
+          <a:lstStyle/>
+          <a:p>
+            <a:fld id="{F7021451-1387-4CA6-816F-3879F97B5CBC}" type="slidenum">
+              <a:rPr lang="en-US"/>
+              <a:t>33</a:t>
+            </a:fld>
+            <a:endParaRPr lang="en-US"/>
+          </a:p>
+        </p:txBody>
+      </p:sp>
+    </p:spTree>
+    <p:extLst>
+      <p:ext uri="{BB962C8B-B14F-4D97-AF65-F5344CB8AC3E}">
+        <p14:creationId xmlns:p14="http://schemas.microsoft.com/office/powerpoint/2010/main" val="1024086991"/>
+      </p:ext>
+    </p:extLst>
+  </p:cSld>
+  <p:clrMapOvr>
+    <a:masterClrMapping/>
+  </p:clrMapOvr>
+</p:notes>
+</file>
+
+<file path=ppt/notesSlides/notesSlide34.xml><?xml version="1.0" encoding="utf-8"?>
+<p:notes xmlns:a="http://schemas.openxmlformats.org/drawingml/2006/main" xmlns:r="http://schemas.openxmlformats.org/officeDocument/2006/relationships" xmlns:p="http://schemas.openxmlformats.org/presentationml/2006/main">
+  <p:cSld>
+    <p:spTree>
+      <p:nvGrpSpPr>
+        <p:cNvPr id="1" name=""/>
+        <p:cNvGrpSpPr/>
+        <p:nvPr/>
+      </p:nvGrpSpPr>
+      <p:grpSpPr>
+        <a:xfrm>
+          <a:off x="0" y="0"/>
+          <a:ext cx="0" cy="0"/>
+          <a:chOff x="0" y="0"/>
+          <a:chExt cx="0" cy="0"/>
+        </a:xfrm>
+      </p:grpSpPr>
+      <p:sp>
+        <p:nvSpPr>
+          <p:cNvPr id="2" name="Slide Image Placeholder 1"/>
+          <p:cNvSpPr>
+            <a:spLocks noGrp="1" noRot="1" noChangeAspect="1"/>
+          </p:cNvSpPr>
+          <p:nvPr>
+            <p:ph type="sldImg"/>
+          </p:nvPr>
+        </p:nvSpPr>
+        <p:spPr/>
+      </p:sp>
+      <p:sp>
+        <p:nvSpPr>
+          <p:cNvPr id="3" name="Notes Placeholder 2"/>
+          <p:cNvSpPr>
+            <a:spLocks noGrp="1"/>
+          </p:cNvSpPr>
+          <p:nvPr>
+            <p:ph type="body" idx="1"/>
+          </p:nvPr>
+        </p:nvSpPr>
+        <p:spPr/>
+        <p:txBody>
+          <a:bodyPr/>
+          <a:lstStyle/>
+          <a:p>
+            <a:r>
+              <a:rPr lang="en-US" dirty="0"/>
+              <a:t/>
+            </a:r>
+            <a:endParaRPr lang="en-US" dirty="0"/>
+          </a:p>
+        </p:txBody>
+      </p:sp>
+      <p:sp>
+        <p:nvSpPr>
+          <p:cNvPr id="4" name="Slide Number Placeholder 3"/>
+          <p:cNvSpPr>
+            <a:spLocks noGrp="1"/>
+          </p:cNvSpPr>
+          <p:nvPr>
+            <p:ph type="sldNum" sz="quarter" idx="10"/>
+          </p:nvPr>
+        </p:nvSpPr>
+        <p:spPr/>
+        <p:txBody>
+          <a:bodyPr/>
+          <a:lstStyle/>
+          <a:p>
+            <a:fld id="{F7021451-1387-4CA6-816F-3879F97B5CBC}" type="slidenum">
+              <a:rPr lang="en-US"/>
+              <a:t>34</a:t>
+            </a:fld>
+            <a:endParaRPr lang="en-US"/>
+          </a:p>
+        </p:txBody>
+      </p:sp>
+    </p:spTree>
+    <p:extLst>
+      <p:ext uri="{BB962C8B-B14F-4D97-AF65-F5344CB8AC3E}">
+        <p14:creationId xmlns:p14="http://schemas.microsoft.com/office/powerpoint/2010/main" val="1024086991"/>
+      </p:ext>
+    </p:extLst>
+  </p:cSld>
+  <p:clrMapOvr>
+    <a:masterClrMapping/>
+  </p:clrMapOvr>
+</p:notes>
+</file>
+
+<file path=ppt/notesSlides/notesSlide35.xml><?xml version="1.0" encoding="utf-8"?>
+<p:notes xmlns:a="http://schemas.openxmlformats.org/drawingml/2006/main" xmlns:r="http://schemas.openxmlformats.org/officeDocument/2006/relationships" xmlns:p="http://schemas.openxmlformats.org/presentationml/2006/main">
+  <p:cSld>
+    <p:spTree>
+      <p:nvGrpSpPr>
+        <p:cNvPr id="1" name=""/>
+        <p:cNvGrpSpPr/>
+        <p:nvPr/>
+      </p:nvGrpSpPr>
+      <p:grpSpPr>
+        <a:xfrm>
+          <a:off x="0" y="0"/>
+          <a:ext cx="0" cy="0"/>
+          <a:chOff x="0" y="0"/>
+          <a:chExt cx="0" cy="0"/>
+        </a:xfrm>
+      </p:grpSpPr>
+      <p:sp>
+        <p:nvSpPr>
+          <p:cNvPr id="2" name="Slide Image Placeholder 1"/>
+          <p:cNvSpPr>
+            <a:spLocks noGrp="1" noRot="1" noChangeAspect="1"/>
+          </p:cNvSpPr>
+          <p:nvPr>
+            <p:ph type="sldImg"/>
+          </p:nvPr>
+        </p:nvSpPr>
+        <p:spPr/>
+      </p:sp>
+      <p:sp>
+        <p:nvSpPr>
+          <p:cNvPr id="3" name="Notes Placeholder 2"/>
+          <p:cNvSpPr>
+            <a:spLocks noGrp="1"/>
+          </p:cNvSpPr>
+          <p:nvPr>
+            <p:ph type="body" idx="1"/>
+          </p:nvPr>
+        </p:nvSpPr>
+        <p:spPr/>
+        <p:txBody>
+          <a:bodyPr/>
+          <a:lstStyle/>
+          <a:p>
+            <a:r>
+              <a:rPr lang="en-US" dirty="0"/>
+              <a:t/>
+            </a:r>
+            <a:endParaRPr lang="en-US" dirty="0"/>
+          </a:p>
+        </p:txBody>
+      </p:sp>
+      <p:sp>
+        <p:nvSpPr>
+          <p:cNvPr id="4" name="Slide Number Placeholder 3"/>
+          <p:cNvSpPr>
+            <a:spLocks noGrp="1"/>
+          </p:cNvSpPr>
+          <p:nvPr>
+            <p:ph type="sldNum" sz="quarter" idx="10"/>
+          </p:nvPr>
+        </p:nvSpPr>
+        <p:spPr/>
+        <p:txBody>
+          <a:bodyPr/>
+          <a:lstStyle/>
+          <a:p>
+            <a:fld id="{F7021451-1387-4CA6-816F-3879F97B5CBC}" type="slidenum">
+              <a:rPr lang="en-US"/>
+              <a:t>35</a:t>
+            </a:fld>
+            <a:endParaRPr lang="en-US"/>
+          </a:p>
+        </p:txBody>
+      </p:sp>
+    </p:spTree>
+    <p:extLst>
+      <p:ext uri="{BB962C8B-B14F-4D97-AF65-F5344CB8AC3E}">
+        <p14:creationId xmlns:p14="http://schemas.microsoft.com/office/powerpoint/2010/main" val="1024086991"/>
+      </p:ext>
+    </p:extLst>
+  </p:cSld>
+  <p:clrMapOvr>
+    <a:masterClrMapping/>
+  </p:clrMapOvr>
+</p:notes>
+</file>
+
+<file path=ppt/notesSlides/notesSlide36.xml><?xml version="1.0" encoding="utf-8"?>
+<p:notes xmlns:a="http://schemas.openxmlformats.org/drawingml/2006/main" xmlns:r="http://schemas.openxmlformats.org/officeDocument/2006/relationships" xmlns:p="http://schemas.openxmlformats.org/presentationml/2006/main">
+  <p:cSld>
+    <p:spTree>
+      <p:nvGrpSpPr>
+        <p:cNvPr id="1" name=""/>
+        <p:cNvGrpSpPr/>
+        <p:nvPr/>
+      </p:nvGrpSpPr>
+      <p:grpSpPr>
+        <a:xfrm>
+          <a:off x="0" y="0"/>
+          <a:ext cx="0" cy="0"/>
+          <a:chOff x="0" y="0"/>
+          <a:chExt cx="0" cy="0"/>
+        </a:xfrm>
+      </p:grpSpPr>
+      <p:sp>
+        <p:nvSpPr>
+          <p:cNvPr id="2" name="Slide Image Placeholder 1"/>
+          <p:cNvSpPr>
+            <a:spLocks noGrp="1" noRot="1" noChangeAspect="1"/>
+          </p:cNvSpPr>
+          <p:nvPr>
+            <p:ph type="sldImg"/>
+          </p:nvPr>
+        </p:nvSpPr>
+        <p:spPr/>
+      </p:sp>
+      <p:sp>
+        <p:nvSpPr>
+          <p:cNvPr id="3" name="Notes Placeholder 2"/>
+          <p:cNvSpPr>
+            <a:spLocks noGrp="1"/>
+          </p:cNvSpPr>
+          <p:nvPr>
+            <p:ph type="body" idx="1"/>
+          </p:nvPr>
+        </p:nvSpPr>
+        <p:spPr/>
+        <p:txBody>
+          <a:bodyPr/>
+          <a:lstStyle/>
+          <a:p>
+            <a:r>
+              <a:rPr lang="en-US" dirty="0"/>
+              <a:t/>
+            </a:r>
+            <a:endParaRPr lang="en-US" dirty="0"/>
+          </a:p>
+        </p:txBody>
+      </p:sp>
+      <p:sp>
+        <p:nvSpPr>
+          <p:cNvPr id="4" name="Slide Number Placeholder 3"/>
+          <p:cNvSpPr>
+            <a:spLocks noGrp="1"/>
+          </p:cNvSpPr>
+          <p:nvPr>
+            <p:ph type="sldNum" sz="quarter" idx="10"/>
+          </p:nvPr>
+        </p:nvSpPr>
+        <p:spPr/>
+        <p:txBody>
+          <a:bodyPr/>
+          <a:lstStyle/>
+          <a:p>
+            <a:fld id="{F7021451-1387-4CA6-816F-3879F97B5CBC}" type="slidenum">
+              <a:rPr lang="en-US"/>
+              <a:t>36</a:t>
+            </a:fld>
+            <a:endParaRPr lang="en-US"/>
+          </a:p>
+        </p:txBody>
+      </p:sp>
+    </p:spTree>
+    <p:extLst>
+      <p:ext uri="{BB962C8B-B14F-4D97-AF65-F5344CB8AC3E}">
+        <p14:creationId xmlns:p14="http://schemas.microsoft.com/office/powerpoint/2010/main" val="1024086991"/>
+      </p:ext>
+    </p:extLst>
+  </p:cSld>
+  <p:clrMapOvr>
+    <a:masterClrMapping/>
+  </p:clrMapOvr>
+</p:notes>
+</file>
+
+<file path=ppt/notesSlides/notesSlide37.xml><?xml version="1.0" encoding="utf-8"?>
+<p:notes xmlns:a="http://schemas.openxmlformats.org/drawingml/2006/main" xmlns:r="http://schemas.openxmlformats.org/officeDocument/2006/relationships" xmlns:p="http://schemas.openxmlformats.org/presentationml/2006/main">
+  <p:cSld>
+    <p:spTree>
+      <p:nvGrpSpPr>
+        <p:cNvPr id="1" name=""/>
+        <p:cNvGrpSpPr/>
+        <p:nvPr/>
+      </p:nvGrpSpPr>
+      <p:grpSpPr>
+        <a:xfrm>
+          <a:off x="0" y="0"/>
+          <a:ext cx="0" cy="0"/>
+          <a:chOff x="0" y="0"/>
+          <a:chExt cx="0" cy="0"/>
+        </a:xfrm>
+      </p:grpSpPr>
+      <p:sp>
+        <p:nvSpPr>
+          <p:cNvPr id="2" name="Slide Image Placeholder 1"/>
+          <p:cNvSpPr>
+            <a:spLocks noGrp="1" noRot="1" noChangeAspect="1"/>
+          </p:cNvSpPr>
+          <p:nvPr>
+            <p:ph type="sldImg"/>
+          </p:nvPr>
+        </p:nvSpPr>
+        <p:spPr/>
+      </p:sp>
+      <p:sp>
+        <p:nvSpPr>
+          <p:cNvPr id="3" name="Notes Placeholder 2"/>
+          <p:cNvSpPr>
+            <a:spLocks noGrp="1"/>
+          </p:cNvSpPr>
+          <p:nvPr>
+            <p:ph type="body" idx="1"/>
+          </p:nvPr>
+        </p:nvSpPr>
+        <p:spPr/>
+        <p:txBody>
+          <a:bodyPr/>
+          <a:lstStyle/>
+          <a:p>
+            <a:r>
+              <a:rPr lang="en-US" dirty="0"/>
+              <a:t/>
+            </a:r>
+            <a:endParaRPr lang="en-US" dirty="0"/>
+          </a:p>
+        </p:txBody>
+      </p:sp>
+      <p:sp>
+        <p:nvSpPr>
+          <p:cNvPr id="4" name="Slide Number Placeholder 3"/>
+          <p:cNvSpPr>
+            <a:spLocks noGrp="1"/>
+          </p:cNvSpPr>
+          <p:nvPr>
+            <p:ph type="sldNum" sz="quarter" idx="10"/>
+          </p:nvPr>
+        </p:nvSpPr>
+        <p:spPr/>
+        <p:txBody>
+          <a:bodyPr/>
+          <a:lstStyle/>
+          <a:p>
+            <a:fld id="{F7021451-1387-4CA6-816F-3879F97B5CBC}" type="slidenum">
+              <a:rPr lang="en-US"/>
+              <a:t>37</a:t>
+            </a:fld>
+            <a:endParaRPr lang="en-US"/>
+          </a:p>
+        </p:txBody>
+      </p:sp>
+    </p:spTree>
+    <p:extLst>
+      <p:ext uri="{BB962C8B-B14F-4D97-AF65-F5344CB8AC3E}">
+        <p14:creationId xmlns:p14="http://schemas.microsoft.com/office/powerpoint/2010/main" val="1024086991"/>
+      </p:ext>
+    </p:extLst>
+  </p:cSld>
+  <p:clrMapOvr>
+    <a:masterClrMapping/>
+  </p:clrMapOvr>
+</p:notes>
+</file>
+
+<file path=ppt/notesSlides/notesSlide38.xml><?xml version="1.0" encoding="utf-8"?>
+<p:notes xmlns:a="http://schemas.openxmlformats.org/drawingml/2006/main" xmlns:r="http://schemas.openxmlformats.org/officeDocument/2006/relationships" xmlns:p="http://schemas.openxmlformats.org/presentationml/2006/main">
+  <p:cSld>
+    <p:spTree>
+      <p:nvGrpSpPr>
+        <p:cNvPr id="1" name=""/>
+        <p:cNvGrpSpPr/>
+        <p:nvPr/>
+      </p:nvGrpSpPr>
+      <p:grpSpPr>
+        <a:xfrm>
+          <a:off x="0" y="0"/>
+          <a:ext cx="0" cy="0"/>
+          <a:chOff x="0" y="0"/>
+          <a:chExt cx="0" cy="0"/>
+        </a:xfrm>
+      </p:grpSpPr>
+      <p:sp>
+        <p:nvSpPr>
+          <p:cNvPr id="2" name="Slide Image Placeholder 1"/>
+          <p:cNvSpPr>
+            <a:spLocks noGrp="1" noRot="1" noChangeAspect="1"/>
+          </p:cNvSpPr>
+          <p:nvPr>
+            <p:ph type="sldImg"/>
+          </p:nvPr>
+        </p:nvSpPr>
+        <p:spPr/>
+      </p:sp>
+      <p:sp>
+        <p:nvSpPr>
+          <p:cNvPr id="3" name="Notes Placeholder 2"/>
+          <p:cNvSpPr>
+            <a:spLocks noGrp="1"/>
+          </p:cNvSpPr>
+          <p:nvPr>
+            <p:ph type="body" idx="1"/>
+          </p:nvPr>
+        </p:nvSpPr>
+        <p:spPr/>
+        <p:txBody>
+          <a:bodyPr/>
+          <a:lstStyle/>
+          <a:p>
+            <a:r>
+              <a:rPr lang="en-US" dirty="0"/>
+              <a:t/>
+            </a:r>
+            <a:endParaRPr lang="en-US" dirty="0"/>
+          </a:p>
+        </p:txBody>
+      </p:sp>
+      <p:sp>
+        <p:nvSpPr>
+          <p:cNvPr id="4" name="Slide Number Placeholder 3"/>
+          <p:cNvSpPr>
+            <a:spLocks noGrp="1"/>
+          </p:cNvSpPr>
+          <p:nvPr>
+            <p:ph type="sldNum" sz="quarter" idx="10"/>
+          </p:nvPr>
+        </p:nvSpPr>
+        <p:spPr/>
+        <p:txBody>
+          <a:bodyPr/>
+          <a:lstStyle/>
+          <a:p>
+            <a:fld id="{F7021451-1387-4CA6-816F-3879F97B5CBC}" type="slidenum">
+              <a:rPr lang="en-US"/>
+              <a:t>38</a:t>
             </a:fld>
             <a:endParaRPr lang="en-US"/>
           </a:p>
@@ -4270,7 +4814,7 @@
                   <a:schemeClr val="bg2"/>
                 </a:solidFill>
               </a:rPr>
-              <a:t>Manual 1.0 · gateway release 0.2.4  ·  October 2026</a:t>
+              <a:t>Manual 1.1 · gateway release 0.2.4 + Devices  ·  October 2026</a:t>
             </a:r>
             <a:endParaRPr lang="en-US" sz="1200" dirty="0"/>
           </a:p>
@@ -9090,8 +9634,8 @@
         </p:blipFill>
         <p:spPr>
           <a:xfrm>
-            <a:off x="457200" y="1066947"/>
-            <a:ext cx="8229600" cy="3489667"/>
+            <a:off x="601627" y="914400"/>
+            <a:ext cx="7940745" cy="3794760"/>
           </a:xfrm>
           <a:prstGeom prst="rect">
             <a:avLst/>
@@ -15771,7 +16315,7 @@
                   <a:schemeClr val="tx1"/>
                 </a:solidFill>
               </a:rPr>
-              <a:t>Data structures</a:t>
+              <a:t>Devices and data</a:t>
             </a:r>
             <a:endParaRPr lang="en-US" sz="1600" dirty="0"/>
           </a:p>
@@ -15807,7 +16351,7 @@
                   <a:schemeClr val="tx2"/>
                 </a:solidFill>
               </a:rPr>
-              <a:t>Relational diagrams for every data store</a:t>
+              <a:t>Registry, device types, activity; relational diagrams</a:t>
             </a:r>
             <a:endParaRPr lang="en-US" sz="1200" dirty="0"/>
           </a:p>
@@ -16073,7 +16617,7 @@
                 <a:ea typeface="Cambria" pitchFamily="34" charset="-122"/>
                 <a:cs typeface="Cambria" pitchFamily="34" charset="-120"/>
               </a:rPr>
-              <a:t>Data structures</a:t>
+              <a:t>Devices at Canopy</a:t>
             </a:r>
             <a:endParaRPr lang="en-US" sz="3600" dirty="0"/>
           </a:p>
@@ -16111,7 +16655,7 @@
                   <a:schemeClr val="bg2"/>
                 </a:solidFill>
               </a:rPr>
-              <a:t>Relational diagrams · solid = foreign key · dashed = logical link</a:t>
+              <a:t>Registry by ward · hospital device types · hourly activity and on/off events</a:t>
             </a:r>
             <a:endParaRPr lang="en-US" sz="1600" dirty="0"/>
           </a:p>
@@ -16177,15 +16721,74 @@
                 <a:ea typeface="Cambria" pitchFamily="34" charset="-122"/>
                 <a:cs typeface="Cambria" pitchFamily="34" charset="-120"/>
               </a:rPr>
-              <a:t>Gateway DB · device registry</a:t>
+              <a:t>One registry for every device and gateway</a:t>
             </a:r>
             <a:endParaRPr lang="en-US" sz="2600" dirty="0"/>
           </a:p>
         </p:txBody>
       </p:sp>
+      <p:sp>
+        <p:nvSpPr>
+          <p:cNvPr id="3" name="card"/>
+          <p:cNvSpPr/>
+          <p:nvPr/>
+        </p:nvSpPr>
+        <p:spPr>
+          <a:xfrm>
+            <a:off x="457200" y="1005840"/>
+            <a:ext cx="4023360" cy="1645920"/>
+          </a:xfrm>
+          <a:prstGeom prst="roundRect">
+            <a:avLst>
+              <a:gd name="adj" fmla="val 4444"/>
+            </a:avLst>
+          </a:prstGeom>
+          <a:solidFill>
+            <a:schemeClr val="bg2"/>
+          </a:solidFill>
+          <a:ln w="12700">
+            <a:solidFill>
+              <a:schemeClr val="bg2"/>
+            </a:solidFill>
+            <a:prstDash val="solid"/>
+          </a:ln>
+          <a:effectLst>
+            <a:outerShdw sx="100000" sy="100000" kx="0" ky="0" algn="bl" rotWithShape="0" blurRad="76200" dist="25400" dir="5400000">
+              <a:srgbClr val="000000">
+                <a:alpha val="12000"/>
+              </a:srgbClr>
+            </a:outerShdw>
+          </a:effectLst>
+        </p:spPr>
+      </p:sp>
+      <p:sp>
+        <p:nvSpPr>
+          <p:cNvPr id="4" name="icon-dot"/>
+          <p:cNvSpPr/>
+          <p:nvPr/>
+        </p:nvSpPr>
+        <p:spPr>
+          <a:xfrm>
+            <a:off x="658368" y="1207008"/>
+            <a:ext cx="457200" cy="457200"/>
+          </a:xfrm>
+          <a:prstGeom prst="ellipse">
+            <a:avLst/>
+          </a:prstGeom>
+          <a:solidFill>
+            <a:schemeClr val="accent1"/>
+          </a:solidFill>
+          <a:ln w="12700">
+            <a:solidFill>
+              <a:schemeClr val="accent1"/>
+            </a:solidFill>
+            <a:prstDash val="solid"/>
+          </a:ln>
+        </p:spPr>
+      </p:sp>
       <p:pic>
         <p:nvPicPr>
-          <p:cNvPr id="3" name="er-1-device-registry" descr="er-1-device-registry.png">    </p:cNvPr>
+          <p:cNvPr id="5" name="icon" descr="preencoded.png">    </p:cNvPr>
           <p:cNvPicPr>
             <a:picLocks noChangeAspect="1"/>
           </p:cNvPicPr>
@@ -16199,14 +16802,551 @@
         </p:blipFill>
         <p:spPr>
           <a:xfrm>
-            <a:off x="1202772" y="868680"/>
-            <a:ext cx="6738457" cy="3886200"/>
+            <a:off x="768096" y="1316736"/>
+            <a:ext cx="237744" cy="237744"/>
           </a:xfrm>
           <a:prstGeom prst="rect">
             <a:avLst/>
           </a:prstGeom>
         </p:spPr>
       </p:pic>
+      <p:sp>
+        <p:nvSpPr>
+          <p:cNvPr id="6" name="Text 3"/>
+          <p:cNvSpPr txBox="1"/>
+          <p:nvPr/>
+        </p:nvSpPr>
+        <p:spPr>
+          <a:xfrm>
+            <a:off x="1298448" y="1252728"/>
+            <a:ext cx="3017520" cy="365760"/>
+          </a:xfrm>
+          <a:prstGeom prst="rect">
+            <a:avLst/>
+          </a:prstGeom>
+          <a:noFill/>
+          <a:ln/>
+        </p:spPr>
+        <p:txBody>
+          <a:bodyPr wrap="square" lIns="0" tIns="0" rIns="0" bIns="0" rtlCol="0" anchor="ctr"/>
+          <a:lstStyle/>
+          <a:p>
+            <a:pPr indent="0" marL="0">
+              <a:buNone/>
+            </a:pPr>
+            <a:r>
+              <a:rPr lang="en-US" sz="1600" b="1" dirty="0">
+                <a:solidFill>
+                  <a:schemeClr val="tx1"/>
+                </a:solidFill>
+              </a:rPr>
+              <a:t>Master record</a:t>
+            </a:r>
+            <a:endParaRPr lang="en-US" sz="1600" dirty="0"/>
+          </a:p>
+        </p:txBody>
+      </p:sp>
+      <p:sp>
+        <p:nvSpPr>
+          <p:cNvPr id="7" name="Text 4"/>
+          <p:cNvSpPr txBox="1"/>
+          <p:nvPr/>
+        </p:nvSpPr>
+        <p:spPr>
+          <a:xfrm>
+            <a:off x="658368" y="1783080"/>
+            <a:ext cx="3639312" cy="804672"/>
+          </a:xfrm>
+          <a:prstGeom prst="rect">
+            <a:avLst/>
+          </a:prstGeom>
+          <a:noFill/>
+          <a:ln/>
+        </p:spPr>
+        <p:txBody>
+          <a:bodyPr wrap="square" lIns="0" tIns="0" rIns="0" bIns="0" rtlCol="0" anchor="t"/>
+          <a:lstStyle/>
+          <a:p>
+            <a:pPr indent="0" marL="0">
+              <a:buNone/>
+            </a:pPr>
+            <a:r>
+              <a:rPr lang="en-US" sz="1200" dirty="0">
+                <a:solidFill>
+                  <a:schemeClr val="tx1"/>
+                </a:solidFill>
+              </a:rPr>
+              <a:t>Asset tag, S/N, model, ward, room, status, warranty and PM dates kept at Canopy</a:t>
+            </a:r>
+            <a:endParaRPr lang="en-US" sz="1200" dirty="0"/>
+          </a:p>
+        </p:txBody>
+      </p:sp>
+      <p:sp>
+        <p:nvSpPr>
+          <p:cNvPr id="8" name="card"/>
+          <p:cNvSpPr/>
+          <p:nvPr/>
+        </p:nvSpPr>
+        <p:spPr>
+          <a:xfrm>
+            <a:off x="4663440" y="1005840"/>
+            <a:ext cx="4023360" cy="1645920"/>
+          </a:xfrm>
+          <a:prstGeom prst="roundRect">
+            <a:avLst>
+              <a:gd name="adj" fmla="val 4444"/>
+            </a:avLst>
+          </a:prstGeom>
+          <a:solidFill>
+            <a:schemeClr val="bg2"/>
+          </a:solidFill>
+          <a:ln w="12700">
+            <a:solidFill>
+              <a:schemeClr val="bg2"/>
+            </a:solidFill>
+            <a:prstDash val="solid"/>
+          </a:ln>
+          <a:effectLst>
+            <a:outerShdw sx="100000" sy="100000" kx="0" ky="0" algn="bl" rotWithShape="0" blurRad="76200" dist="25400" dir="5400000">
+              <a:srgbClr val="000000">
+                <a:alpha val="12000"/>
+              </a:srgbClr>
+            </a:outerShdw>
+          </a:effectLst>
+        </p:spPr>
+      </p:sp>
+      <p:sp>
+        <p:nvSpPr>
+          <p:cNvPr id="9" name="icon-dot"/>
+          <p:cNvSpPr/>
+          <p:nvPr/>
+        </p:nvSpPr>
+        <p:spPr>
+          <a:xfrm>
+            <a:off x="4864608" y="1207008"/>
+            <a:ext cx="457200" cy="457200"/>
+          </a:xfrm>
+          <a:prstGeom prst="ellipse">
+            <a:avLst/>
+          </a:prstGeom>
+          <a:solidFill>
+            <a:schemeClr val="accent2"/>
+          </a:solidFill>
+          <a:ln w="12700">
+            <a:solidFill>
+              <a:schemeClr val="accent2"/>
+            </a:solidFill>
+            <a:prstDash val="solid"/>
+          </a:ln>
+        </p:spPr>
+      </p:sp>
+      <p:pic>
+        <p:nvPicPr>
+          <p:cNvPr id="10" name="icon" descr="preencoded.png">    </p:cNvPr>
+          <p:cNvPicPr>
+            <a:picLocks noChangeAspect="1"/>
+          </p:cNvPicPr>
+          <p:nvPr/>
+        </p:nvPicPr>
+        <p:blipFill>
+          <a:blip r:embed="rId2"/>
+          <a:stretch>
+            <a:fillRect/>
+          </a:stretch>
+        </p:blipFill>
+        <p:spPr>
+          <a:xfrm>
+            <a:off x="4974336" y="1316736"/>
+            <a:ext cx="237744" cy="237744"/>
+          </a:xfrm>
+          <a:prstGeom prst="rect">
+            <a:avLst/>
+          </a:prstGeom>
+        </p:spPr>
+      </p:pic>
+      <p:sp>
+        <p:nvSpPr>
+          <p:cNvPr id="11" name="Text 7"/>
+          <p:cNvSpPr txBox="1"/>
+          <p:nvPr/>
+        </p:nvSpPr>
+        <p:spPr>
+          <a:xfrm>
+            <a:off x="5504688" y="1252728"/>
+            <a:ext cx="3017520" cy="365760"/>
+          </a:xfrm>
+          <a:prstGeom prst="rect">
+            <a:avLst/>
+          </a:prstGeom>
+          <a:noFill/>
+          <a:ln/>
+        </p:spPr>
+        <p:txBody>
+          <a:bodyPr wrap="square" lIns="0" tIns="0" rIns="0" bIns="0" rtlCol="0" anchor="ctr"/>
+          <a:lstStyle/>
+          <a:p>
+            <a:pPr indent="0" marL="0">
+              <a:buNone/>
+            </a:pPr>
+            <a:r>
+              <a:rPr lang="en-US" sz="1600" b="1" dirty="0">
+                <a:solidFill>
+                  <a:schemeClr val="tx1"/>
+                </a:solidFill>
+              </a:rPr>
+              <a:t>Added automatically</a:t>
+            </a:r>
+            <a:endParaRPr lang="en-US" sz="1600" dirty="0"/>
+          </a:p>
+        </p:txBody>
+      </p:sp>
+      <p:sp>
+        <p:nvSpPr>
+          <p:cNvPr id="12" name="Text 8"/>
+          <p:cNvSpPr txBox="1"/>
+          <p:nvPr/>
+        </p:nvSpPr>
+        <p:spPr>
+          <a:xfrm>
+            <a:off x="4864608" y="1783080"/>
+            <a:ext cx="3639312" cy="804672"/>
+          </a:xfrm>
+          <a:prstGeom prst="rect">
+            <a:avLst/>
+          </a:prstGeom>
+          <a:noFill/>
+          <a:ln/>
+        </p:spPr>
+        <p:txBody>
+          <a:bodyPr wrap="square" lIns="0" tIns="0" rIns="0" bIns="0" rtlCol="0" anchor="t"/>
+          <a:lstStyle/>
+          <a:p>
+            <a:pPr indent="0" marL="0">
+              <a:buNone/>
+            </a:pPr>
+            <a:r>
+              <a:rPr lang="en-US" sz="1200" dirty="0">
+                <a:solidFill>
+                  <a:schemeClr val="tx1"/>
+                </a:solidFill>
+              </a:rPr>
+              <a:t>Unknown gateways and the devices they report appear flagged Review; saving registers them</a:t>
+            </a:r>
+            <a:endParaRPr lang="en-US" sz="1200" dirty="0"/>
+          </a:p>
+        </p:txBody>
+      </p:sp>
+      <p:sp>
+        <p:nvSpPr>
+          <p:cNvPr id="13" name="card"/>
+          <p:cNvSpPr/>
+          <p:nvPr/>
+        </p:nvSpPr>
+        <p:spPr>
+          <a:xfrm>
+            <a:off x="457200" y="2834640"/>
+            <a:ext cx="4023360" cy="1645920"/>
+          </a:xfrm>
+          <a:prstGeom prst="roundRect">
+            <a:avLst>
+              <a:gd name="adj" fmla="val 4444"/>
+            </a:avLst>
+          </a:prstGeom>
+          <a:solidFill>
+            <a:schemeClr val="bg2"/>
+          </a:solidFill>
+          <a:ln w="12700">
+            <a:solidFill>
+              <a:schemeClr val="bg2"/>
+            </a:solidFill>
+            <a:prstDash val="solid"/>
+          </a:ln>
+          <a:effectLst>
+            <a:outerShdw sx="100000" sy="100000" kx="0" ky="0" algn="bl" rotWithShape="0" blurRad="76200" dist="25400" dir="5400000">
+              <a:srgbClr val="000000">
+                <a:alpha val="12000"/>
+              </a:srgbClr>
+            </a:outerShdw>
+          </a:effectLst>
+        </p:spPr>
+      </p:sp>
+      <p:sp>
+        <p:nvSpPr>
+          <p:cNvPr id="14" name="icon-dot"/>
+          <p:cNvSpPr/>
+          <p:nvPr/>
+        </p:nvSpPr>
+        <p:spPr>
+          <a:xfrm>
+            <a:off x="658368" y="3035808"/>
+            <a:ext cx="457200" cy="457200"/>
+          </a:xfrm>
+          <a:prstGeom prst="ellipse">
+            <a:avLst/>
+          </a:prstGeom>
+          <a:solidFill>
+            <a:schemeClr val="accent3"/>
+          </a:solidFill>
+          <a:ln w="12700">
+            <a:solidFill>
+              <a:schemeClr val="accent3"/>
+            </a:solidFill>
+            <a:prstDash val="solid"/>
+          </a:ln>
+        </p:spPr>
+      </p:sp>
+      <p:pic>
+        <p:nvPicPr>
+          <p:cNvPr id="15" name="icon" descr="preencoded.png">    </p:cNvPr>
+          <p:cNvPicPr>
+            <a:picLocks noChangeAspect="1"/>
+          </p:cNvPicPr>
+          <p:nvPr/>
+        </p:nvPicPr>
+        <p:blipFill>
+          <a:blip r:embed="rId3"/>
+          <a:stretch>
+            <a:fillRect/>
+          </a:stretch>
+        </p:blipFill>
+        <p:spPr>
+          <a:xfrm>
+            <a:off x="768096" y="3145536"/>
+            <a:ext cx="237744" cy="237744"/>
+          </a:xfrm>
+          <a:prstGeom prst="rect">
+            <a:avLst/>
+          </a:prstGeom>
+        </p:spPr>
+      </p:pic>
+      <p:sp>
+        <p:nvSpPr>
+          <p:cNvPr id="16" name="Text 11"/>
+          <p:cNvSpPr txBox="1"/>
+          <p:nvPr/>
+        </p:nvSpPr>
+        <p:spPr>
+          <a:xfrm>
+            <a:off x="1298448" y="3081528"/>
+            <a:ext cx="3017520" cy="365760"/>
+          </a:xfrm>
+          <a:prstGeom prst="rect">
+            <a:avLst/>
+          </a:prstGeom>
+          <a:noFill/>
+          <a:ln/>
+        </p:spPr>
+        <p:txBody>
+          <a:bodyPr wrap="square" lIns="0" tIns="0" rIns="0" bIns="0" rtlCol="0" anchor="ctr"/>
+          <a:lstStyle/>
+          <a:p>
+            <a:pPr indent="0" marL="0">
+              <a:buNone/>
+            </a:pPr>
+            <a:r>
+              <a:rPr lang="en-US" sz="1600" b="1" dirty="0">
+                <a:solidFill>
+                  <a:schemeClr val="tx1"/>
+                </a:solidFill>
+              </a:rPr>
+              <a:t>Matched at check-in</a:t>
+            </a:r>
+            <a:endParaRPr lang="en-US" sz="1600" dirty="0"/>
+          </a:p>
+        </p:txBody>
+      </p:sp>
+      <p:sp>
+        <p:nvSpPr>
+          <p:cNvPr id="17" name="Text 12"/>
+          <p:cNvSpPr txBox="1"/>
+          <p:nvPr/>
+        </p:nvSpPr>
+        <p:spPr>
+          <a:xfrm>
+            <a:off x="658368" y="3611880"/>
+            <a:ext cx="3639312" cy="804672"/>
+          </a:xfrm>
+          <a:prstGeom prst="rect">
+            <a:avLst/>
+          </a:prstGeom>
+          <a:noFill/>
+          <a:ln/>
+        </p:spPr>
+        <p:txBody>
+          <a:bodyPr wrap="square" lIns="0" tIns="0" rIns="0" bIns="0" rtlCol="0" anchor="t"/>
+          <a:lstStyle/>
+          <a:p>
+            <a:pPr indent="0" marL="0">
+              <a:buNone/>
+            </a:pPr>
+            <a:r>
+              <a:rPr lang="en-US" sz="1200" dirty="0">
+                <a:solidFill>
+                  <a:schemeClr val="tx1"/>
+                </a:solidFill>
+              </a:rPr>
+              <a:t>By existing link, then asset tag, then serial; moved devices re-link; admin fields never overwritten</a:t>
+            </a:r>
+            <a:endParaRPr lang="en-US" sz="1200" dirty="0"/>
+          </a:p>
+        </p:txBody>
+      </p:sp>
+      <p:sp>
+        <p:nvSpPr>
+          <p:cNvPr id="18" name="card"/>
+          <p:cNvSpPr/>
+          <p:nvPr/>
+        </p:nvSpPr>
+        <p:spPr>
+          <a:xfrm>
+            <a:off x="4663440" y="2834640"/>
+            <a:ext cx="4023360" cy="1645920"/>
+          </a:xfrm>
+          <a:prstGeom prst="roundRect">
+            <a:avLst>
+              <a:gd name="adj" fmla="val 4444"/>
+            </a:avLst>
+          </a:prstGeom>
+          <a:solidFill>
+            <a:schemeClr val="bg2"/>
+          </a:solidFill>
+          <a:ln w="12700">
+            <a:solidFill>
+              <a:schemeClr val="bg2"/>
+            </a:solidFill>
+            <a:prstDash val="solid"/>
+          </a:ln>
+          <a:effectLst>
+            <a:outerShdw sx="100000" sy="100000" kx="0" ky="0" algn="bl" rotWithShape="0" blurRad="76200" dist="25400" dir="5400000">
+              <a:srgbClr val="000000">
+                <a:alpha val="12000"/>
+              </a:srgbClr>
+            </a:outerShdw>
+          </a:effectLst>
+        </p:spPr>
+      </p:sp>
+      <p:sp>
+        <p:nvSpPr>
+          <p:cNvPr id="19" name="icon-dot"/>
+          <p:cNvSpPr/>
+          <p:nvPr/>
+        </p:nvSpPr>
+        <p:spPr>
+          <a:xfrm>
+            <a:off x="4864608" y="3035808"/>
+            <a:ext cx="457200" cy="457200"/>
+          </a:xfrm>
+          <a:prstGeom prst="ellipse">
+            <a:avLst/>
+          </a:prstGeom>
+          <a:solidFill>
+            <a:schemeClr val="accent5"/>
+          </a:solidFill>
+          <a:ln w="12700">
+            <a:solidFill>
+              <a:schemeClr val="accent5"/>
+            </a:solidFill>
+            <a:prstDash val="solid"/>
+          </a:ln>
+        </p:spPr>
+      </p:sp>
+      <p:pic>
+        <p:nvPicPr>
+          <p:cNvPr id="20" name="icon" descr="preencoded.png">    </p:cNvPr>
+          <p:cNvPicPr>
+            <a:picLocks noChangeAspect="1"/>
+          </p:cNvPicPr>
+          <p:nvPr/>
+        </p:nvPicPr>
+        <p:blipFill>
+          <a:blip r:embed="rId4"/>
+          <a:stretch>
+            <a:fillRect/>
+          </a:stretch>
+        </p:blipFill>
+        <p:spPr>
+          <a:xfrm>
+            <a:off x="4974336" y="3145536"/>
+            <a:ext cx="237744" cy="237744"/>
+          </a:xfrm>
+          <a:prstGeom prst="rect">
+            <a:avLst/>
+          </a:prstGeom>
+        </p:spPr>
+      </p:pic>
+      <p:sp>
+        <p:nvSpPr>
+          <p:cNvPr id="21" name="Text 15"/>
+          <p:cNvSpPr txBox="1"/>
+          <p:nvPr/>
+        </p:nvSpPr>
+        <p:spPr>
+          <a:xfrm>
+            <a:off x="5504688" y="3081528"/>
+            <a:ext cx="3017520" cy="365760"/>
+          </a:xfrm>
+          <a:prstGeom prst="rect">
+            <a:avLst/>
+          </a:prstGeom>
+          <a:noFill/>
+          <a:ln/>
+        </p:spPr>
+        <p:txBody>
+          <a:bodyPr wrap="square" lIns="0" tIns="0" rIns="0" bIns="0" rtlCol="0" anchor="ctr"/>
+          <a:lstStyle/>
+          <a:p>
+            <a:pPr indent="0" marL="0">
+              <a:buNone/>
+            </a:pPr>
+            <a:r>
+              <a:rPr lang="en-US" sz="1600" b="1" dirty="0">
+                <a:solidFill>
+                  <a:schemeClr val="tx1"/>
+                </a:solidFill>
+              </a:rPr>
+              <a:t>Grouped by ward</a:t>
+            </a:r>
+            <a:endParaRPr lang="en-US" sz="1600" dirty="0"/>
+          </a:p>
+        </p:txBody>
+      </p:sp>
+      <p:sp>
+        <p:nvSpPr>
+          <p:cNvPr id="22" name="Text 16"/>
+          <p:cNvSpPr txBox="1"/>
+          <p:nvPr/>
+        </p:nvSpPr>
+        <p:spPr>
+          <a:xfrm>
+            <a:off x="4864608" y="3611880"/>
+            <a:ext cx="3639312" cy="804672"/>
+          </a:xfrm>
+          <a:prstGeom prst="rect">
+            <a:avLst/>
+          </a:prstGeom>
+          <a:noFill/>
+          <a:ln/>
+        </p:spPr>
+        <p:txBody>
+          <a:bodyPr wrap="square" lIns="0" tIns="0" rIns="0" bIns="0" rtlCol="0" anchor="t"/>
+          <a:lstStyle/>
+          <a:p>
+            <a:pPr indent="0" marL="0">
+              <a:buNone/>
+            </a:pPr>
+            <a:r>
+              <a:rPr lang="en-US" sz="1200" dirty="0">
+                <a:solidFill>
+                  <a:schemeClr val="tx1"/>
+                </a:solidFill>
+              </a:rPr>
+              <a:t>Gateway: the ward it is installed in. Device: its own ward. Ward users see their own</a:t>
+            </a:r>
+            <a:endParaRPr lang="en-US" sz="1200" dirty="0"/>
+          </a:p>
+        </p:txBody>
+      </p:sp>
       <p:sp>
         <p:nvSpPr>
           <p:cNvPr id="25" name="Slide Number Placeholder 0"/>
@@ -16312,15 +17452,40 @@
                 <a:ea typeface="Cambria" pitchFamily="34" charset="-122"/>
                 <a:cs typeface="Cambria" pitchFamily="34" charset="-120"/>
               </a:rPr>
-              <a:t>Gateway DB · licence, site, Canopy link, users</a:t>
+              <a:t>Hospital device types reach every gateway</a:t>
             </a:r>
             <a:endParaRPr lang="en-US" sz="2600" dirty="0"/>
           </a:p>
         </p:txBody>
       </p:sp>
+      <p:sp>
+        <p:nvSpPr>
+          <p:cNvPr id="3" name="icon-dot"/>
+          <p:cNvSpPr/>
+          <p:nvPr/>
+        </p:nvSpPr>
+        <p:spPr>
+          <a:xfrm>
+            <a:off x="1097280" y="1051560"/>
+            <a:ext cx="594360" cy="594360"/>
+          </a:xfrm>
+          <a:prstGeom prst="ellipse">
+            <a:avLst/>
+          </a:prstGeom>
+          <a:solidFill>
+            <a:schemeClr val="accent1"/>
+          </a:solidFill>
+          <a:ln w="12700">
+            <a:solidFill>
+              <a:schemeClr val="accent1"/>
+            </a:solidFill>
+            <a:prstDash val="solid"/>
+          </a:ln>
+        </p:spPr>
+      </p:sp>
       <p:pic>
         <p:nvPicPr>
-          <p:cNvPr id="3" name="er-2-license-site-auth" descr="er-2-license-site-auth.png">    </p:cNvPr>
+          <p:cNvPr id="4" name="icon" descr="preencoded.png">    </p:cNvPr>
           <p:cNvPicPr>
             <a:picLocks noChangeAspect="1"/>
           </p:cNvPicPr>
@@ -16334,14 +17499,618 @@
         </p:blipFill>
         <p:spPr>
           <a:xfrm>
-            <a:off x="1759618" y="868680"/>
-            <a:ext cx="5624763" cy="3886200"/>
+            <a:off x="1239926" y="1194206"/>
+            <a:ext cx="309067" cy="309067"/>
           </a:xfrm>
           <a:prstGeom prst="rect">
             <a:avLst/>
           </a:prstGeom>
         </p:spPr>
       </p:pic>
+      <p:sp>
+        <p:nvSpPr>
+          <p:cNvPr id="5" name="Text 2"/>
+          <p:cNvSpPr txBox="1"/>
+          <p:nvPr/>
+        </p:nvSpPr>
+        <p:spPr>
+          <a:xfrm>
+            <a:off x="457200" y="1737360"/>
+            <a:ext cx="1874520" cy="320040"/>
+          </a:xfrm>
+          <a:prstGeom prst="rect">
+            <a:avLst/>
+          </a:prstGeom>
+          <a:noFill/>
+          <a:ln/>
+        </p:spPr>
+        <p:txBody>
+          <a:bodyPr wrap="square" lIns="0" tIns="0" rIns="0" bIns="0" rtlCol="0" anchor="t"/>
+          <a:lstStyle/>
+          <a:p>
+            <a:pPr algn="ctr" indent="0" marL="0">
+              <a:buNone/>
+            </a:pPr>
+            <a:r>
+              <a:rPr lang="en-US" sz="1300" b="1" dirty="0">
+                <a:solidFill>
+                  <a:schemeClr val="tx1"/>
+                </a:solidFill>
+              </a:rPr>
+              <a:t>Admin adds type</a:t>
+            </a:r>
+            <a:endParaRPr lang="en-US" sz="1300" dirty="0"/>
+          </a:p>
+        </p:txBody>
+      </p:sp>
+      <p:sp>
+        <p:nvSpPr>
+          <p:cNvPr id="6" name="Text 3"/>
+          <p:cNvSpPr txBox="1"/>
+          <p:nvPr/>
+        </p:nvSpPr>
+        <p:spPr>
+          <a:xfrm>
+            <a:off x="457200" y="2057400"/>
+            <a:ext cx="1874520" cy="274320"/>
+          </a:xfrm>
+          <a:prstGeom prst="rect">
+            <a:avLst/>
+          </a:prstGeom>
+          <a:noFill/>
+          <a:ln/>
+        </p:spPr>
+        <p:txBody>
+          <a:bodyPr wrap="square" lIns="0" tIns="0" rIns="0" bIns="0" rtlCol="0" anchor="t"/>
+          <a:lstStyle/>
+          <a:p>
+            <a:pPr algn="ctr" indent="0" marL="0">
+              <a:buNone/>
+            </a:pPr>
+            <a:r>
+              <a:rPr lang="en-US" sz="1100" dirty="0">
+                <a:solidFill>
+                  <a:schemeClr val="tx2"/>
+                </a:solidFill>
+              </a:rPr>
+              <a:t>Devices → Device types</a:t>
+            </a:r>
+            <a:endParaRPr lang="en-US" sz="1100" dirty="0"/>
+          </a:p>
+        </p:txBody>
+      </p:sp>
+      <p:sp>
+        <p:nvSpPr>
+          <p:cNvPr id="7" name="flow-arrow"/>
+          <p:cNvSpPr/>
+          <p:nvPr/>
+        </p:nvSpPr>
+        <p:spPr>
+          <a:xfrm>
+            <a:off x="2121408" y="1234440"/>
+            <a:ext cx="365760" cy="228600"/>
+          </a:xfrm>
+          <a:prstGeom prst="rightArrow">
+            <a:avLst/>
+          </a:prstGeom>
+          <a:solidFill>
+            <a:schemeClr val="tx2"/>
+          </a:solidFill>
+          <a:ln w="12700">
+            <a:solidFill>
+              <a:schemeClr val="tx2"/>
+            </a:solidFill>
+            <a:prstDash val="solid"/>
+          </a:ln>
+        </p:spPr>
+      </p:sp>
+      <p:sp>
+        <p:nvSpPr>
+          <p:cNvPr id="8" name="icon-dot"/>
+          <p:cNvSpPr/>
+          <p:nvPr/>
+        </p:nvSpPr>
+        <p:spPr>
+          <a:xfrm>
+            <a:off x="3246120" y="1051560"/>
+            <a:ext cx="594360" cy="594360"/>
+          </a:xfrm>
+          <a:prstGeom prst="ellipse">
+            <a:avLst/>
+          </a:prstGeom>
+          <a:solidFill>
+            <a:schemeClr val="accent1"/>
+          </a:solidFill>
+          <a:ln w="12700">
+            <a:solidFill>
+              <a:schemeClr val="accent1"/>
+            </a:solidFill>
+            <a:prstDash val="solid"/>
+          </a:ln>
+        </p:spPr>
+      </p:sp>
+      <p:pic>
+        <p:nvPicPr>
+          <p:cNvPr id="9" name="icon" descr="preencoded.png">    </p:cNvPr>
+          <p:cNvPicPr>
+            <a:picLocks noChangeAspect="1"/>
+          </p:cNvPicPr>
+          <p:nvPr/>
+        </p:nvPicPr>
+        <p:blipFill>
+          <a:blip r:embed="rId2"/>
+          <a:stretch>
+            <a:fillRect/>
+          </a:stretch>
+        </p:blipFill>
+        <p:spPr>
+          <a:xfrm>
+            <a:off x="3388766" y="1194206"/>
+            <a:ext cx="309067" cy="309067"/>
+          </a:xfrm>
+          <a:prstGeom prst="rect">
+            <a:avLst/>
+          </a:prstGeom>
+        </p:spPr>
+      </p:pic>
+      <p:sp>
+        <p:nvSpPr>
+          <p:cNvPr id="10" name="Text 6"/>
+          <p:cNvSpPr txBox="1"/>
+          <p:nvPr/>
+        </p:nvSpPr>
+        <p:spPr>
+          <a:xfrm>
+            <a:off x="2606040" y="1737360"/>
+            <a:ext cx="1874520" cy="320040"/>
+          </a:xfrm>
+          <a:prstGeom prst="rect">
+            <a:avLst/>
+          </a:prstGeom>
+          <a:noFill/>
+          <a:ln/>
+        </p:spPr>
+        <p:txBody>
+          <a:bodyPr wrap="square" lIns="0" tIns="0" rIns="0" bIns="0" rtlCol="0" anchor="t"/>
+          <a:lstStyle/>
+          <a:p>
+            <a:pPr algn="ctr" indent="0" marL="0">
+              <a:buNone/>
+            </a:pPr>
+            <a:r>
+              <a:rPr lang="en-US" sz="1300" b="1" dirty="0">
+                <a:solidFill>
+                  <a:schemeClr val="tx1"/>
+                </a:solidFill>
+              </a:rPr>
+              <a:t>Canopy answers check-in</a:t>
+            </a:r>
+            <a:endParaRPr lang="en-US" sz="1300" dirty="0"/>
+          </a:p>
+        </p:txBody>
+      </p:sp>
+      <p:sp>
+        <p:nvSpPr>
+          <p:cNvPr id="11" name="Text 7"/>
+          <p:cNvSpPr txBox="1"/>
+          <p:nvPr/>
+        </p:nvSpPr>
+        <p:spPr>
+          <a:xfrm>
+            <a:off x="2606040" y="2057400"/>
+            <a:ext cx="1874520" cy="274320"/>
+          </a:xfrm>
+          <a:prstGeom prst="rect">
+            <a:avLst/>
+          </a:prstGeom>
+          <a:noFill/>
+          <a:ln/>
+        </p:spPr>
+        <p:txBody>
+          <a:bodyPr wrap="square" lIns="0" tIns="0" rIns="0" bIns="0" rtlCol="0" anchor="t"/>
+          <a:lstStyle/>
+          <a:p>
+            <a:pPr algn="ctr" indent="0" marL="0">
+              <a:buNone/>
+            </a:pPr>
+            <a:r>
+              <a:rPr lang="en-US" sz="1100" dirty="0">
+                <a:solidFill>
+                  <a:schemeClr val="tx2"/>
+                </a:solidFill>
+              </a:rPr>
+              <a:t>enabled types</a:t>
+            </a:r>
+            <a:endParaRPr lang="en-US" sz="1100" dirty="0"/>
+          </a:p>
+        </p:txBody>
+      </p:sp>
+      <p:sp>
+        <p:nvSpPr>
+          <p:cNvPr id="12" name="flow-arrow"/>
+          <p:cNvSpPr/>
+          <p:nvPr/>
+        </p:nvSpPr>
+        <p:spPr>
+          <a:xfrm>
+            <a:off x="4270248" y="1234440"/>
+            <a:ext cx="365760" cy="228600"/>
+          </a:xfrm>
+          <a:prstGeom prst="rightArrow">
+            <a:avLst/>
+          </a:prstGeom>
+          <a:solidFill>
+            <a:schemeClr val="tx2"/>
+          </a:solidFill>
+          <a:ln w="12700">
+            <a:solidFill>
+              <a:schemeClr val="tx2"/>
+            </a:solidFill>
+            <a:prstDash val="solid"/>
+          </a:ln>
+        </p:spPr>
+      </p:sp>
+      <p:sp>
+        <p:nvSpPr>
+          <p:cNvPr id="13" name="icon-dot"/>
+          <p:cNvSpPr/>
+          <p:nvPr/>
+        </p:nvSpPr>
+        <p:spPr>
+          <a:xfrm>
+            <a:off x="5394960" y="1051560"/>
+            <a:ext cx="594360" cy="594360"/>
+          </a:xfrm>
+          <a:prstGeom prst="ellipse">
+            <a:avLst/>
+          </a:prstGeom>
+          <a:solidFill>
+            <a:schemeClr val="accent1"/>
+          </a:solidFill>
+          <a:ln w="12700">
+            <a:solidFill>
+              <a:schemeClr val="accent1"/>
+            </a:solidFill>
+            <a:prstDash val="solid"/>
+          </a:ln>
+        </p:spPr>
+      </p:sp>
+      <p:pic>
+        <p:nvPicPr>
+          <p:cNvPr id="14" name="icon" descr="preencoded.png">    </p:cNvPr>
+          <p:cNvPicPr>
+            <a:picLocks noChangeAspect="1"/>
+          </p:cNvPicPr>
+          <p:nvPr/>
+        </p:nvPicPr>
+        <p:blipFill>
+          <a:blip r:embed="rId3"/>
+          <a:stretch>
+            <a:fillRect/>
+          </a:stretch>
+        </p:blipFill>
+        <p:spPr>
+          <a:xfrm>
+            <a:off x="5537606" y="1194206"/>
+            <a:ext cx="309067" cy="309067"/>
+          </a:xfrm>
+          <a:prstGeom prst="rect">
+            <a:avLst/>
+          </a:prstGeom>
+        </p:spPr>
+      </p:pic>
+      <p:sp>
+        <p:nvSpPr>
+          <p:cNvPr id="15" name="Text 10"/>
+          <p:cNvSpPr txBox="1"/>
+          <p:nvPr/>
+        </p:nvSpPr>
+        <p:spPr>
+          <a:xfrm>
+            <a:off x="4754880" y="1737360"/>
+            <a:ext cx="1874520" cy="320040"/>
+          </a:xfrm>
+          <a:prstGeom prst="rect">
+            <a:avLst/>
+          </a:prstGeom>
+          <a:noFill/>
+          <a:ln/>
+        </p:spPr>
+        <p:txBody>
+          <a:bodyPr wrap="square" lIns="0" tIns="0" rIns="0" bIns="0" rtlCol="0" anchor="t"/>
+          <a:lstStyle/>
+          <a:p>
+            <a:pPr algn="ctr" indent="0" marL="0">
+              <a:buNone/>
+            </a:pPr>
+            <a:r>
+              <a:rPr lang="en-US" sz="1300" b="1" dirty="0">
+                <a:solidFill>
+                  <a:schemeClr val="tx1"/>
+                </a:solidFill>
+              </a:rPr>
+              <a:t>Haber adds image + licence</a:t>
+            </a:r>
+            <a:endParaRPr lang="en-US" sz="1300" dirty="0"/>
+          </a:p>
+        </p:txBody>
+      </p:sp>
+      <p:sp>
+        <p:nvSpPr>
+          <p:cNvPr id="16" name="Text 11"/>
+          <p:cNvSpPr txBox="1"/>
+          <p:nvPr/>
+        </p:nvSpPr>
+        <p:spPr>
+          <a:xfrm>
+            <a:off x="4754880" y="2057400"/>
+            <a:ext cx="1874520" cy="274320"/>
+          </a:xfrm>
+          <a:prstGeom prst="rect">
+            <a:avLst/>
+          </a:prstGeom>
+          <a:noFill/>
+          <a:ln/>
+        </p:spPr>
+        <p:txBody>
+          <a:bodyPr wrap="square" lIns="0" tIns="0" rIns="0" bIns="0" rtlCol="0" anchor="t"/>
+          <a:lstStyle/>
+          <a:p>
+            <a:pPr algn="ctr" indent="0" marL="0">
+              <a:buNone/>
+            </a:pPr>
+            <a:r>
+              <a:rPr lang="en-US" sz="1100" dirty="0">
+                <a:solidFill>
+                  <a:schemeClr val="tx2"/>
+                </a:solidFill>
+              </a:rPr>
+              <a:t>release parser image</a:t>
+            </a:r>
+            <a:endParaRPr lang="en-US" sz="1100" dirty="0"/>
+          </a:p>
+        </p:txBody>
+      </p:sp>
+      <p:sp>
+        <p:nvSpPr>
+          <p:cNvPr id="17" name="flow-arrow"/>
+          <p:cNvSpPr/>
+          <p:nvPr/>
+        </p:nvSpPr>
+        <p:spPr>
+          <a:xfrm>
+            <a:off x="6419088" y="1234440"/>
+            <a:ext cx="365760" cy="228600"/>
+          </a:xfrm>
+          <a:prstGeom prst="rightArrow">
+            <a:avLst/>
+          </a:prstGeom>
+          <a:solidFill>
+            <a:schemeClr val="tx2"/>
+          </a:solidFill>
+          <a:ln w="12700">
+            <a:solidFill>
+              <a:schemeClr val="tx2"/>
+            </a:solidFill>
+            <a:prstDash val="solid"/>
+          </a:ln>
+        </p:spPr>
+      </p:sp>
+      <p:sp>
+        <p:nvSpPr>
+          <p:cNvPr id="18" name="icon-dot"/>
+          <p:cNvSpPr/>
+          <p:nvPr/>
+        </p:nvSpPr>
+        <p:spPr>
+          <a:xfrm>
+            <a:off x="7543800" y="1051560"/>
+            <a:ext cx="594360" cy="594360"/>
+          </a:xfrm>
+          <a:prstGeom prst="ellipse">
+            <a:avLst/>
+          </a:prstGeom>
+          <a:solidFill>
+            <a:schemeClr val="accent2"/>
+          </a:solidFill>
+          <a:ln w="12700">
+            <a:solidFill>
+              <a:schemeClr val="accent2"/>
+            </a:solidFill>
+            <a:prstDash val="solid"/>
+          </a:ln>
+        </p:spPr>
+      </p:sp>
+      <p:pic>
+        <p:nvPicPr>
+          <p:cNvPr id="19" name="icon" descr="preencoded.png">    </p:cNvPr>
+          <p:cNvPicPr>
+            <a:picLocks noChangeAspect="1"/>
+          </p:cNvPicPr>
+          <p:nvPr/>
+        </p:nvPicPr>
+        <p:blipFill>
+          <a:blip r:embed="rId4"/>
+          <a:stretch>
+            <a:fillRect/>
+          </a:stretch>
+        </p:blipFill>
+        <p:spPr>
+          <a:xfrm>
+            <a:off x="7686446" y="1194206"/>
+            <a:ext cx="309067" cy="309067"/>
+          </a:xfrm>
+          <a:prstGeom prst="rect">
+            <a:avLst/>
+          </a:prstGeom>
+        </p:spPr>
+      </p:pic>
+      <p:sp>
+        <p:nvSpPr>
+          <p:cNvPr id="20" name="Text 14"/>
+          <p:cNvSpPr txBox="1"/>
+          <p:nvPr/>
+        </p:nvSpPr>
+        <p:spPr>
+          <a:xfrm>
+            <a:off x="6903720" y="1737360"/>
+            <a:ext cx="1874520" cy="320040"/>
+          </a:xfrm>
+          <a:prstGeom prst="rect">
+            <a:avLst/>
+          </a:prstGeom>
+          <a:noFill/>
+          <a:ln/>
+        </p:spPr>
+        <p:txBody>
+          <a:bodyPr wrap="square" lIns="0" tIns="0" rIns="0" bIns="0" rtlCol="0" anchor="t"/>
+          <a:lstStyle/>
+          <a:p>
+            <a:pPr algn="ctr" indent="0" marL="0">
+              <a:buNone/>
+            </a:pPr>
+            <a:r>
+              <a:rPr lang="en-US" sz="1300" b="1" dirty="0">
+                <a:solidFill>
+                  <a:schemeClr val="tx1"/>
+                </a:solidFill>
+              </a:rPr>
+              <a:t>Gateway catalog</a:t>
+            </a:r>
+            <a:endParaRPr lang="en-US" sz="1300" dirty="0"/>
+          </a:p>
+        </p:txBody>
+      </p:sp>
+      <p:sp>
+        <p:nvSpPr>
+          <p:cNvPr id="21" name="Text 15"/>
+          <p:cNvSpPr txBox="1"/>
+          <p:nvPr/>
+        </p:nvSpPr>
+        <p:spPr>
+          <a:xfrm>
+            <a:off x="6903720" y="2057400"/>
+            <a:ext cx="1874520" cy="274320"/>
+          </a:xfrm>
+          <a:prstGeom prst="rect">
+            <a:avLst/>
+          </a:prstGeom>
+          <a:noFill/>
+          <a:ln/>
+        </p:spPr>
+        <p:txBody>
+          <a:bodyPr wrap="square" lIns="0" tIns="0" rIns="0" bIns="0" rtlCol="0" anchor="t"/>
+          <a:lstStyle/>
+          <a:p>
+            <a:pPr algn="ctr" indent="0" marL="0">
+              <a:buNone/>
+            </a:pPr>
+            <a:r>
+              <a:rPr lang="en-US" sz="1100" dirty="0">
+                <a:solidFill>
+                  <a:schemeClr val="tx2"/>
+                </a:solidFill>
+              </a:rPr>
+              <a:t>origin: canopy</a:t>
+            </a:r>
+            <a:endParaRPr lang="en-US" sz="1100" dirty="0"/>
+          </a:p>
+        </p:txBody>
+      </p:sp>
+      <p:sp>
+        <p:nvSpPr>
+          <p:cNvPr id="22" name="Text 16"/>
+          <p:cNvSpPr txBox="1"/>
+          <p:nvPr/>
+        </p:nvSpPr>
+        <p:spPr>
+          <a:xfrm>
+            <a:off x="731520" y="2651760"/>
+            <a:ext cx="7680960" cy="1920240"/>
+          </a:xfrm>
+          <a:prstGeom prst="rect">
+            <a:avLst/>
+          </a:prstGeom>
+          <a:noFill/>
+          <a:ln/>
+        </p:spPr>
+        <p:txBody>
+          <a:bodyPr wrap="square" lIns="0" tIns="0" rIns="0" bIns="0" rtlCol="0" anchor="t"/>
+          <a:lstStyle/>
+          <a:p>
+            <a:pPr marL="342900" indent="-342900">
+              <a:spcAft>
+                <a:spcPts val="600"/>
+              </a:spcAft>
+              <a:buSzPct val="100000"/>
+              <a:buChar char="•"/>
+            </a:pPr>
+            <a:r>
+              <a:rPr lang="en-US" sz="1350" dirty="0">
+                <a:solidFill>
+                  <a:schemeClr val="tx1"/>
+                </a:solidFill>
+              </a:rPr>
+              <a:t>Start from scratch or "Use as template" on a Flora Root release type</a:t>
+            </a:r>
+            <a:endParaRPr lang="en-US" sz="1350" dirty="0"/>
+          </a:p>
+          <a:p>
+            <a:pPr marL="342900" indent="-342900">
+              <a:spcAft>
+                <a:spcPts val="600"/>
+              </a:spcAft>
+              <a:buSzPct val="100000"/>
+              <a:buChar char="•"/>
+            </a:pPr>
+            <a:r>
+              <a:rPr lang="en-US" sz="1350" dirty="0">
+                <a:solidFill>
+                  <a:schemeClr val="tx1"/>
+                </a:solidFill>
+              </a:rPr>
+              <a:t>Licensed when Root licenses a type with the same parser; Root codes cannot be reused</a:t>
+            </a:r>
+            <a:endParaRPr lang="en-US" sz="1350" dirty="0"/>
+          </a:p>
+          <a:p>
+            <a:pPr marL="342900" indent="-342900">
+              <a:spcAft>
+                <a:spcPts val="600"/>
+              </a:spcAft>
+              <a:buSzPct val="100000"/>
+              <a:buChar char="•"/>
+            </a:pPr>
+            <a:r>
+              <a:rPr lang="en-US" sz="1350" dirty="0">
+                <a:solidFill>
+                  <a:schemeClr val="tx1"/>
+                </a:solidFill>
+              </a:rPr>
+              <a:t>Connection defaults checked with the gateway's own rules</a:t>
+            </a:r>
+            <a:endParaRPr lang="en-US" sz="1350" dirty="0"/>
+          </a:p>
+          <a:p>
+            <a:pPr marL="342900" indent="-342900">
+              <a:spcAft>
+                <a:spcPts val="600"/>
+              </a:spcAft>
+              <a:buSzPct val="100000"/>
+              <a:buChar char="•"/>
+            </a:pPr>
+            <a:r>
+              <a:rPr lang="en-US" sz="1350" dirty="0">
+                <a:solidFill>
+                  <a:schemeClr val="tx1"/>
+                </a:solidFill>
+              </a:rPr>
+              <a:t>Arrives at the next check-in (≈ 20 s); disable to stop delivery, delete only when unused</a:t>
+            </a:r>
+            <a:endParaRPr lang="en-US" sz="1350" dirty="0"/>
+          </a:p>
+        </p:txBody>
+      </p:sp>
       <p:sp>
         <p:nvSpPr>
           <p:cNvPr id="25" name="Slide Number Placeholder 0"/>
@@ -16447,15 +18216,74 @@
                 <a:ea typeface="Cambria" pitchFamily="34" charset="-122"/>
                 <a:cs typeface="Cambria" pitchFamily="34" charset="-120"/>
               </a:rPr>
-              <a:t>Gateway DB · observations (time series)</a:t>
+              <a:t>Hourly activity and on/off events</a:t>
             </a:r>
             <a:endParaRPr lang="en-US" sz="2600" dirty="0"/>
           </a:p>
         </p:txBody>
       </p:sp>
+      <p:sp>
+        <p:nvSpPr>
+          <p:cNvPr id="3" name="card"/>
+          <p:cNvSpPr/>
+          <p:nvPr/>
+        </p:nvSpPr>
+        <p:spPr>
+          <a:xfrm>
+            <a:off x="457200" y="960120"/>
+            <a:ext cx="4937760" cy="1051560"/>
+          </a:xfrm>
+          <a:prstGeom prst="roundRect">
+            <a:avLst>
+              <a:gd name="adj" fmla="val 6957"/>
+            </a:avLst>
+          </a:prstGeom>
+          <a:solidFill>
+            <a:schemeClr val="bg2"/>
+          </a:solidFill>
+          <a:ln w="12700">
+            <a:solidFill>
+              <a:schemeClr val="bg2"/>
+            </a:solidFill>
+            <a:prstDash val="solid"/>
+          </a:ln>
+          <a:effectLst>
+            <a:outerShdw sx="100000" sy="100000" kx="0" ky="0" algn="bl" rotWithShape="0" blurRad="76200" dist="25400" dir="5400000">
+              <a:srgbClr val="000000">
+                <a:alpha val="12000"/>
+              </a:srgbClr>
+            </a:outerShdw>
+          </a:effectLst>
+        </p:spPr>
+      </p:sp>
+      <p:sp>
+        <p:nvSpPr>
+          <p:cNvPr id="4" name="icon-dot"/>
+          <p:cNvSpPr/>
+          <p:nvPr/>
+        </p:nvSpPr>
+        <p:spPr>
+          <a:xfrm>
+            <a:off x="640080" y="1234440"/>
+            <a:ext cx="457200" cy="457200"/>
+          </a:xfrm>
+          <a:prstGeom prst="ellipse">
+            <a:avLst/>
+          </a:prstGeom>
+          <a:solidFill>
+            <a:schemeClr val="accent1"/>
+          </a:solidFill>
+          <a:ln w="12700">
+            <a:solidFill>
+              <a:schemeClr val="accent1"/>
+            </a:solidFill>
+            <a:prstDash val="solid"/>
+          </a:ln>
+        </p:spPr>
+      </p:sp>
       <p:pic>
         <p:nvPicPr>
-          <p:cNvPr id="3" name="er-3-observations" descr="er-3-observations.png">    </p:cNvPr>
+          <p:cNvPr id="5" name="icon" descr="preencoded.png">    </p:cNvPr>
           <p:cNvPicPr>
             <a:picLocks noChangeAspect="1"/>
           </p:cNvPicPr>
@@ -16469,14 +18297,828 @@
         </p:blipFill>
         <p:spPr>
           <a:xfrm>
-            <a:off x="1438517" y="868680"/>
-            <a:ext cx="6266966" cy="3886200"/>
+            <a:off x="749808" y="1344168"/>
+            <a:ext cx="237744" cy="237744"/>
           </a:xfrm>
           <a:prstGeom prst="rect">
             <a:avLst/>
           </a:prstGeom>
         </p:spPr>
       </p:pic>
+      <p:sp>
+        <p:nvSpPr>
+          <p:cNvPr id="6" name="Text 3"/>
+          <p:cNvSpPr txBox="1"/>
+          <p:nvPr/>
+        </p:nvSpPr>
+        <p:spPr>
+          <a:xfrm>
+            <a:off x="1280160" y="1069848"/>
+            <a:ext cx="2926080" cy="320040"/>
+          </a:xfrm>
+          <a:prstGeom prst="rect">
+            <a:avLst/>
+          </a:prstGeom>
+          <a:noFill/>
+          <a:ln/>
+        </p:spPr>
+        <p:txBody>
+          <a:bodyPr wrap="square" lIns="0" tIns="0" rIns="0" bIns="0" rtlCol="0" anchor="t"/>
+          <a:lstStyle/>
+          <a:p>
+            <a:pPr indent="0" marL="0">
+              <a:buNone/>
+            </a:pPr>
+            <a:r>
+              <a:rPr lang="en-US" sz="1500" b="1" dirty="0">
+                <a:solidFill>
+                  <a:schemeClr val="tx1"/>
+                </a:solidFill>
+              </a:rPr>
+              <a:t>Powered on / off</a:t>
+            </a:r>
+            <a:endParaRPr lang="en-US" sz="1500" dirty="0"/>
+          </a:p>
+        </p:txBody>
+      </p:sp>
+      <p:sp>
+        <p:nvSpPr>
+          <p:cNvPr id="7" name="Text 4"/>
+          <p:cNvSpPr txBox="1"/>
+          <p:nvPr/>
+        </p:nvSpPr>
+        <p:spPr>
+          <a:xfrm>
+            <a:off x="4206240" y="1088136"/>
+            <a:ext cx="1097280" cy="274320"/>
+          </a:xfrm>
+          <a:prstGeom prst="rect">
+            <a:avLst/>
+          </a:prstGeom>
+          <a:noFill/>
+          <a:ln/>
+        </p:spPr>
+        <p:txBody>
+          <a:bodyPr wrap="square" lIns="0" tIns="0" rIns="0" bIns="0" rtlCol="0" anchor="t"/>
+          <a:lstStyle/>
+          <a:p>
+            <a:pPr algn="r" indent="0" marL="0">
+              <a:buNone/>
+            </a:pPr>
+            <a:r>
+              <a:rPr lang="en-US" sz="1100" dirty="0">
+                <a:solidFill>
+                  <a:schemeClr val="tx2"/>
+                </a:solidFill>
+              </a:rPr>
+              <a:t>connection</a:t>
+            </a:r>
+            <a:endParaRPr lang="en-US" sz="1100" dirty="0"/>
+          </a:p>
+        </p:txBody>
+      </p:sp>
+      <p:sp>
+        <p:nvSpPr>
+          <p:cNvPr id="8" name="Text 5"/>
+          <p:cNvSpPr txBox="1"/>
+          <p:nvPr/>
+        </p:nvSpPr>
+        <p:spPr>
+          <a:xfrm>
+            <a:off x="1280160" y="1389888"/>
+            <a:ext cx="3977640" cy="566928"/>
+          </a:xfrm>
+          <a:prstGeom prst="rect">
+            <a:avLst/>
+          </a:prstGeom>
+          <a:noFill/>
+          <a:ln/>
+        </p:spPr>
+        <p:txBody>
+          <a:bodyPr wrap="square" lIns="0" tIns="0" rIns="0" bIns="0" rtlCol="0" anchor="t"/>
+          <a:lstStyle/>
+          <a:p>
+            <a:pPr indent="0" marL="0">
+              <a:buNone/>
+            </a:pPr>
+            <a:r>
+              <a:rPr lang="en-US" sz="1100" dirty="0">
+                <a:solidFill>
+                  <a:schemeClr val="tx1"/>
+                </a:solidFill>
+              </a:rPr>
+              <a:t>The device's own link came up or went down (TCP connection, UDP data, answered polls) on a pod only it uses</a:t>
+            </a:r>
+            <a:endParaRPr lang="en-US" sz="1100" dirty="0"/>
+          </a:p>
+        </p:txBody>
+      </p:sp>
+      <p:sp>
+        <p:nvSpPr>
+          <p:cNvPr id="9" name="card"/>
+          <p:cNvSpPr/>
+          <p:nvPr/>
+        </p:nvSpPr>
+        <p:spPr>
+          <a:xfrm>
+            <a:off x="457200" y="2148840"/>
+            <a:ext cx="4937760" cy="1051560"/>
+          </a:xfrm>
+          <a:prstGeom prst="roundRect">
+            <a:avLst>
+              <a:gd name="adj" fmla="val 6957"/>
+            </a:avLst>
+          </a:prstGeom>
+          <a:solidFill>
+            <a:schemeClr val="bg2"/>
+          </a:solidFill>
+          <a:ln w="12700">
+            <a:solidFill>
+              <a:schemeClr val="bg2"/>
+            </a:solidFill>
+            <a:prstDash val="solid"/>
+          </a:ln>
+          <a:effectLst>
+            <a:outerShdw sx="100000" sy="100000" kx="0" ky="0" algn="bl" rotWithShape="0" blurRad="76200" dist="25400" dir="5400000">
+              <a:srgbClr val="000000">
+                <a:alpha val="12000"/>
+              </a:srgbClr>
+            </a:outerShdw>
+          </a:effectLst>
+        </p:spPr>
+      </p:sp>
+      <p:sp>
+        <p:nvSpPr>
+          <p:cNvPr id="10" name="icon-dot"/>
+          <p:cNvSpPr/>
+          <p:nvPr/>
+        </p:nvSpPr>
+        <p:spPr>
+          <a:xfrm>
+            <a:off x="640080" y="2423160"/>
+            <a:ext cx="457200" cy="457200"/>
+          </a:xfrm>
+          <a:prstGeom prst="ellipse">
+            <a:avLst/>
+          </a:prstGeom>
+          <a:solidFill>
+            <a:schemeClr val="accent2"/>
+          </a:solidFill>
+          <a:ln w="12700">
+            <a:solidFill>
+              <a:schemeClr val="accent2"/>
+            </a:solidFill>
+            <a:prstDash val="solid"/>
+          </a:ln>
+        </p:spPr>
+      </p:sp>
+      <p:pic>
+        <p:nvPicPr>
+          <p:cNvPr id="11" name="icon" descr="preencoded.png">    </p:cNvPr>
+          <p:cNvPicPr>
+            <a:picLocks noChangeAspect="1"/>
+          </p:cNvPicPr>
+          <p:nvPr/>
+        </p:nvPicPr>
+        <p:blipFill>
+          <a:blip r:embed="rId2"/>
+          <a:stretch>
+            <a:fillRect/>
+          </a:stretch>
+        </p:blipFill>
+        <p:spPr>
+          <a:xfrm>
+            <a:off x="749808" y="2532888"/>
+            <a:ext cx="237744" cy="237744"/>
+          </a:xfrm>
+          <a:prstGeom prst="rect">
+            <a:avLst/>
+          </a:prstGeom>
+        </p:spPr>
+      </p:pic>
+      <p:sp>
+        <p:nvSpPr>
+          <p:cNvPr id="12" name="Text 8"/>
+          <p:cNvSpPr txBox="1"/>
+          <p:nvPr/>
+        </p:nvSpPr>
+        <p:spPr>
+          <a:xfrm>
+            <a:off x="1280160" y="2258568"/>
+            <a:ext cx="2926080" cy="320040"/>
+          </a:xfrm>
+          <a:prstGeom prst="rect">
+            <a:avLst/>
+          </a:prstGeom>
+          <a:noFill/>
+          <a:ln/>
+        </p:spPr>
+        <p:txBody>
+          <a:bodyPr wrap="square" lIns="0" tIns="0" rIns="0" bIns="0" rtlCol="0" anchor="t"/>
+          <a:lstStyle/>
+          <a:p>
+            <a:pPr indent="0" marL="0">
+              <a:buNone/>
+            </a:pPr>
+            <a:r>
+              <a:rPr lang="en-US" sz="1500" b="1" dirty="0">
+                <a:solidFill>
+                  <a:schemeClr val="tx1"/>
+                </a:solidFill>
+              </a:rPr>
+              <a:t>Data resumed / stopped</a:t>
+            </a:r>
+            <a:endParaRPr lang="en-US" sz="1500" dirty="0"/>
+          </a:p>
+        </p:txBody>
+      </p:sp>
+      <p:sp>
+        <p:nvSpPr>
+          <p:cNvPr id="13" name="Text 9"/>
+          <p:cNvSpPr txBox="1"/>
+          <p:nvPr/>
+        </p:nvSpPr>
+        <p:spPr>
+          <a:xfrm>
+            <a:off x="4206240" y="2276856"/>
+            <a:ext cx="1097280" cy="274320"/>
+          </a:xfrm>
+          <a:prstGeom prst="rect">
+            <a:avLst/>
+          </a:prstGeom>
+          <a:noFill/>
+          <a:ln/>
+        </p:spPr>
+        <p:txBody>
+          <a:bodyPr wrap="square" lIns="0" tIns="0" rIns="0" bIns="0" rtlCol="0" anchor="t"/>
+          <a:lstStyle/>
+          <a:p>
+            <a:pPr algn="r" indent="0" marL="0">
+              <a:buNone/>
+            </a:pPr>
+            <a:r>
+              <a:rPr lang="en-US" sz="1100" dirty="0">
+                <a:solidFill>
+                  <a:schemeClr val="tx2"/>
+                </a:solidFill>
+              </a:rPr>
+              <a:t>data</a:t>
+            </a:r>
+            <a:endParaRPr lang="en-US" sz="1100" dirty="0"/>
+          </a:p>
+        </p:txBody>
+      </p:sp>
+      <p:sp>
+        <p:nvSpPr>
+          <p:cNvPr id="14" name="Text 10"/>
+          <p:cNvSpPr txBox="1"/>
+          <p:nvPr/>
+        </p:nvSpPr>
+        <p:spPr>
+          <a:xfrm>
+            <a:off x="1280160" y="2578608"/>
+            <a:ext cx="3977640" cy="566928"/>
+          </a:xfrm>
+          <a:prstGeom prst="rect">
+            <a:avLst/>
+          </a:prstGeom>
+          <a:noFill/>
+          <a:ln/>
+        </p:spPr>
+        <p:txBody>
+          <a:bodyPr wrap="square" lIns="0" tIns="0" rIns="0" bIns="0" rtlCol="0" anchor="t"/>
+          <a:lstStyle/>
+          <a:p>
+            <a:pPr indent="0" marL="0">
+              <a:buNone/>
+            </a:pPr>
+            <a:r>
+              <a:rPr lang="en-US" sz="1100" dirty="0">
+                <a:solidFill>
+                  <a:schemeClr val="tx1"/>
+                </a:solidFill>
+              </a:rPr>
+              <a:t>Data started again or stopped for 2 minutes — the device may be off, unplugged or idle</a:t>
+            </a:r>
+            <a:endParaRPr lang="en-US" sz="1100" dirty="0"/>
+          </a:p>
+        </p:txBody>
+      </p:sp>
+      <p:sp>
+        <p:nvSpPr>
+          <p:cNvPr id="15" name="card"/>
+          <p:cNvSpPr/>
+          <p:nvPr/>
+        </p:nvSpPr>
+        <p:spPr>
+          <a:xfrm>
+            <a:off x="5669280" y="960120"/>
+            <a:ext cx="3017520" cy="2240280"/>
+          </a:xfrm>
+          <a:prstGeom prst="roundRect">
+            <a:avLst>
+              <a:gd name="adj" fmla="val 3265"/>
+            </a:avLst>
+          </a:prstGeom>
+          <a:solidFill>
+            <a:schemeClr val="bg2"/>
+          </a:solidFill>
+          <a:ln w="12700">
+            <a:solidFill>
+              <a:schemeClr val="bg2"/>
+            </a:solidFill>
+            <a:prstDash val="solid"/>
+          </a:ln>
+          <a:effectLst>
+            <a:outerShdw sx="100000" sy="100000" kx="0" ky="0" algn="bl" rotWithShape="0" blurRad="76200" dist="25400" dir="5400000">
+              <a:srgbClr val="000000">
+                <a:alpha val="12000"/>
+              </a:srgbClr>
+            </a:outerShdw>
+          </a:effectLst>
+        </p:spPr>
+      </p:sp>
+      <p:sp>
+        <p:nvSpPr>
+          <p:cNvPr id="16" name="Text 12"/>
+          <p:cNvSpPr txBox="1"/>
+          <p:nvPr/>
+        </p:nvSpPr>
+        <p:spPr>
+          <a:xfrm>
+            <a:off x="5852160" y="1097280"/>
+            <a:ext cx="2743200" cy="320040"/>
+          </a:xfrm>
+          <a:prstGeom prst="rect">
+            <a:avLst/>
+          </a:prstGeom>
+          <a:noFill/>
+          <a:ln/>
+        </p:spPr>
+        <p:txBody>
+          <a:bodyPr wrap="square" lIns="0" tIns="0" rIns="0" bIns="0" rtlCol="0" anchor="t"/>
+          <a:lstStyle/>
+          <a:p>
+            <a:pPr indent="0" marL="0">
+              <a:buNone/>
+            </a:pPr>
+            <a:r>
+              <a:rPr lang="en-US" sz="1400" b="1" dirty="0">
+                <a:solidFill>
+                  <a:schemeClr val="tx2"/>
+                </a:solidFill>
+              </a:rPr>
+              <a:t>Every hour, per device</a:t>
+            </a:r>
+            <a:endParaRPr lang="en-US" sz="1400" dirty="0"/>
+          </a:p>
+        </p:txBody>
+      </p:sp>
+      <p:sp>
+        <p:nvSpPr>
+          <p:cNvPr id="17" name="Text 13"/>
+          <p:cNvSpPr txBox="1"/>
+          <p:nvPr/>
+        </p:nvSpPr>
+        <p:spPr>
+          <a:xfrm>
+            <a:off x="5852160" y="1463040"/>
+            <a:ext cx="2743200" cy="1645920"/>
+          </a:xfrm>
+          <a:prstGeom prst="rect">
+            <a:avLst/>
+          </a:prstGeom>
+          <a:noFill/>
+          <a:ln/>
+        </p:spPr>
+        <p:txBody>
+          <a:bodyPr wrap="square" lIns="0" tIns="0" rIns="0" bIns="0" rtlCol="0" anchor="t"/>
+          <a:lstStyle/>
+          <a:p>
+            <a:pPr marL="342900" indent="-342900">
+              <a:spcAft>
+                <a:spcPts val="400"/>
+              </a:spcAft>
+              <a:buSzPct val="100000"/>
+              <a:buChar char="•"/>
+            </a:pPr>
+            <a:r>
+              <a:rPr lang="en-US" sz="1200" dirty="0">
+                <a:solidFill>
+                  <a:schemeClr val="tx1"/>
+                </a:solidFill>
+              </a:rPr>
+              <a:t>Share of the hour sending data</a:t>
+            </a:r>
+            <a:endParaRPr lang="en-US" sz="1200" dirty="0"/>
+          </a:p>
+          <a:p>
+            <a:pPr marL="342900" indent="-342900">
+              <a:spcAft>
+                <a:spcPts val="400"/>
+              </a:spcAft>
+              <a:buSzPct val="100000"/>
+              <a:buChar char="•"/>
+            </a:pPr>
+            <a:r>
+              <a:rPr lang="en-US" sz="1200" dirty="0">
+                <a:solidFill>
+                  <a:schemeClr val="tx1"/>
+                </a:solidFill>
+              </a:rPr>
+              <a:t>Values received</a:t>
+            </a:r>
+            <a:endParaRPr lang="en-US" sz="1200" dirty="0"/>
+          </a:p>
+          <a:p>
+            <a:pPr marL="342900" indent="-342900">
+              <a:spcAft>
+                <a:spcPts val="400"/>
+              </a:spcAft>
+              <a:buSzPct val="100000"/>
+              <a:buChar char="•"/>
+            </a:pPr>
+            <a:r>
+              <a:rPr lang="en-US" sz="1200" dirty="0">
+                <a:solidFill>
+                  <a:schemeClr val="tx1"/>
+                </a:solidFill>
+              </a:rPr>
+              <a:t>Power on / off counts</a:t>
+            </a:r>
+            <a:endParaRPr lang="en-US" sz="1200" dirty="0"/>
+          </a:p>
+          <a:p>
+            <a:pPr marL="342900" indent="-342900">
+              <a:spcAft>
+                <a:spcPts val="400"/>
+              </a:spcAft>
+              <a:buSzPct val="100000"/>
+              <a:buChar char="•"/>
+            </a:pPr>
+            <a:r>
+              <a:rPr lang="en-US" sz="1200" dirty="0">
+                <a:solidFill>
+                  <a:schemeClr val="tx1"/>
+                </a:solidFill>
+              </a:rPr>
+              <a:t>Rebuilt every 10 min, resent until confirmed</a:t>
+            </a:r>
+            <a:endParaRPr lang="en-US" sz="1200" dirty="0"/>
+          </a:p>
+        </p:txBody>
+      </p:sp>
+      <p:sp>
+        <p:nvSpPr>
+          <p:cNvPr id="18" name="legend-swatch"/>
+          <p:cNvSpPr/>
+          <p:nvPr/>
+        </p:nvSpPr>
+        <p:spPr>
+          <a:xfrm>
+            <a:off x="457200" y="3657600"/>
+            <a:ext cx="274320" cy="274320"/>
+          </a:xfrm>
+          <a:prstGeom prst="roundRect">
+            <a:avLst>
+              <a:gd name="adj" fmla="val 13333"/>
+            </a:avLst>
+          </a:prstGeom>
+          <a:solidFill>
+            <a:srgbClr val="10B981"/>
+          </a:solidFill>
+          <a:ln w="12700">
+            <a:solidFill>
+              <a:srgbClr val="10B981"/>
+            </a:solidFill>
+            <a:prstDash val="solid"/>
+          </a:ln>
+        </p:spPr>
+      </p:sp>
+      <p:sp>
+        <p:nvSpPr>
+          <p:cNvPr id="19" name="Text 15"/>
+          <p:cNvSpPr txBox="1"/>
+          <p:nvPr/>
+        </p:nvSpPr>
+        <p:spPr>
+          <a:xfrm>
+            <a:off x="822960" y="3657600"/>
+            <a:ext cx="1188720" cy="274320"/>
+          </a:xfrm>
+          <a:prstGeom prst="rect">
+            <a:avLst/>
+          </a:prstGeom>
+          <a:noFill/>
+          <a:ln/>
+        </p:spPr>
+        <p:txBody>
+          <a:bodyPr wrap="square" lIns="0" tIns="0" rIns="0" bIns="0" rtlCol="0" anchor="ctr"/>
+          <a:lstStyle/>
+          <a:p>
+            <a:pPr indent="0" marL="0">
+              <a:buNone/>
+            </a:pPr>
+            <a:r>
+              <a:rPr lang="en-US" sz="1200" dirty="0">
+                <a:solidFill>
+                  <a:schemeClr val="tx1"/>
+                </a:solidFill>
+              </a:rPr>
+              <a:t>≥ 95 %</a:t>
+            </a:r>
+            <a:endParaRPr lang="en-US" sz="1200" dirty="0"/>
+          </a:p>
+        </p:txBody>
+      </p:sp>
+      <p:sp>
+        <p:nvSpPr>
+          <p:cNvPr id="20" name="legend-swatch"/>
+          <p:cNvSpPr/>
+          <p:nvPr/>
+        </p:nvSpPr>
+        <p:spPr>
+          <a:xfrm>
+            <a:off x="2103120" y="3657600"/>
+            <a:ext cx="274320" cy="274320"/>
+          </a:xfrm>
+          <a:prstGeom prst="roundRect">
+            <a:avLst>
+              <a:gd name="adj" fmla="val 13333"/>
+            </a:avLst>
+          </a:prstGeom>
+          <a:solidFill>
+            <a:srgbClr val="FBBF24"/>
+          </a:solidFill>
+          <a:ln w="12700">
+            <a:solidFill>
+              <a:srgbClr val="FBBF24"/>
+            </a:solidFill>
+            <a:prstDash val="solid"/>
+          </a:ln>
+        </p:spPr>
+      </p:sp>
+      <p:sp>
+        <p:nvSpPr>
+          <p:cNvPr id="21" name="Text 17"/>
+          <p:cNvSpPr txBox="1"/>
+          <p:nvPr/>
+        </p:nvSpPr>
+        <p:spPr>
+          <a:xfrm>
+            <a:off x="2468880" y="3657600"/>
+            <a:ext cx="1188720" cy="274320"/>
+          </a:xfrm>
+          <a:prstGeom prst="rect">
+            <a:avLst/>
+          </a:prstGeom>
+          <a:noFill/>
+          <a:ln/>
+        </p:spPr>
+        <p:txBody>
+          <a:bodyPr wrap="square" lIns="0" tIns="0" rIns="0" bIns="0" rtlCol="0" anchor="ctr"/>
+          <a:lstStyle/>
+          <a:p>
+            <a:pPr indent="0" marL="0">
+              <a:buNone/>
+            </a:pPr>
+            <a:r>
+              <a:rPr lang="en-US" sz="1200" dirty="0">
+                <a:solidFill>
+                  <a:schemeClr val="tx1"/>
+                </a:solidFill>
+              </a:rPr>
+              <a:t>50–95 %</a:t>
+            </a:r>
+            <a:endParaRPr lang="en-US" sz="1200" dirty="0"/>
+          </a:p>
+        </p:txBody>
+      </p:sp>
+      <p:sp>
+        <p:nvSpPr>
+          <p:cNvPr id="22" name="legend-swatch"/>
+          <p:cNvSpPr/>
+          <p:nvPr/>
+        </p:nvSpPr>
+        <p:spPr>
+          <a:xfrm>
+            <a:off x="3749040" y="3657600"/>
+            <a:ext cx="274320" cy="274320"/>
+          </a:xfrm>
+          <a:prstGeom prst="roundRect">
+            <a:avLst>
+              <a:gd name="adj" fmla="val 13333"/>
+            </a:avLst>
+          </a:prstGeom>
+          <a:solidFill>
+            <a:srgbClr val="F97316"/>
+          </a:solidFill>
+          <a:ln w="12700">
+            <a:solidFill>
+              <a:srgbClr val="F97316"/>
+            </a:solidFill>
+            <a:prstDash val="solid"/>
+          </a:ln>
+        </p:spPr>
+      </p:sp>
+      <p:sp>
+        <p:nvSpPr>
+          <p:cNvPr id="23" name="Text 19"/>
+          <p:cNvSpPr txBox="1"/>
+          <p:nvPr/>
+        </p:nvSpPr>
+        <p:spPr>
+          <a:xfrm>
+            <a:off x="4114800" y="3657600"/>
+            <a:ext cx="1188720" cy="274320"/>
+          </a:xfrm>
+          <a:prstGeom prst="rect">
+            <a:avLst/>
+          </a:prstGeom>
+          <a:noFill/>
+          <a:ln/>
+        </p:spPr>
+        <p:txBody>
+          <a:bodyPr wrap="square" lIns="0" tIns="0" rIns="0" bIns="0" rtlCol="0" anchor="ctr"/>
+          <a:lstStyle/>
+          <a:p>
+            <a:pPr indent="0" marL="0">
+              <a:buNone/>
+            </a:pPr>
+            <a:r>
+              <a:rPr lang="en-US" sz="1200" dirty="0">
+                <a:solidFill>
+                  <a:schemeClr val="tx1"/>
+                </a:solidFill>
+              </a:rPr>
+              <a:t>&lt; 50 %</a:t>
+            </a:r>
+            <a:endParaRPr lang="en-US" sz="1200" dirty="0"/>
+          </a:p>
+        </p:txBody>
+      </p:sp>
+      <p:sp>
+        <p:nvSpPr>
+          <p:cNvPr id="24" name="legend-swatch"/>
+          <p:cNvSpPr/>
+          <p:nvPr/>
+        </p:nvSpPr>
+        <p:spPr>
+          <a:xfrm>
+            <a:off x="5394960" y="3657600"/>
+            <a:ext cx="274320" cy="274320"/>
+          </a:xfrm>
+          <a:prstGeom prst="roundRect">
+            <a:avLst>
+              <a:gd name="adj" fmla="val 13333"/>
+            </a:avLst>
+          </a:prstGeom>
+          <a:solidFill>
+            <a:srgbClr val="F43F5E"/>
+          </a:solidFill>
+          <a:ln w="12700">
+            <a:solidFill>
+              <a:srgbClr val="F43F5E"/>
+            </a:solidFill>
+            <a:prstDash val="solid"/>
+          </a:ln>
+        </p:spPr>
+      </p:sp>
+      <p:sp>
+        <p:nvSpPr>
+          <p:cNvPr id="25" name="Text 21"/>
+          <p:cNvSpPr txBox="1"/>
+          <p:nvPr/>
+        </p:nvSpPr>
+        <p:spPr>
+          <a:xfrm>
+            <a:off x="5760720" y="3657600"/>
+            <a:ext cx="1188720" cy="274320"/>
+          </a:xfrm>
+          <a:prstGeom prst="rect">
+            <a:avLst/>
+          </a:prstGeom>
+          <a:noFill/>
+          <a:ln/>
+        </p:spPr>
+        <p:txBody>
+          <a:bodyPr wrap="square" lIns="0" tIns="0" rIns="0" bIns="0" rtlCol="0" anchor="ctr"/>
+          <a:lstStyle/>
+          <a:p>
+            <a:pPr indent="0" marL="0">
+              <a:buNone/>
+            </a:pPr>
+            <a:r>
+              <a:rPr lang="en-US" sz="1200" dirty="0">
+                <a:solidFill>
+                  <a:schemeClr val="tx1"/>
+                </a:solidFill>
+              </a:rPr>
+              <a:t>no data</a:t>
+            </a:r>
+            <a:endParaRPr lang="en-US" sz="1200" dirty="0"/>
+          </a:p>
+        </p:txBody>
+      </p:sp>
+      <p:sp>
+        <p:nvSpPr>
+          <p:cNvPr id="26" name="legend-swatch"/>
+          <p:cNvSpPr/>
+          <p:nvPr/>
+        </p:nvSpPr>
+        <p:spPr>
+          <a:xfrm>
+            <a:off x="7040880" y="3657600"/>
+            <a:ext cx="274320" cy="274320"/>
+          </a:xfrm>
+          <a:prstGeom prst="roundRect">
+            <a:avLst>
+              <a:gd name="adj" fmla="val 13333"/>
+            </a:avLst>
+          </a:prstGeom>
+          <a:solidFill>
+            <a:srgbClr val="CBD5E1"/>
+          </a:solidFill>
+          <a:ln w="12700">
+            <a:solidFill>
+              <a:srgbClr val="CBD5E1"/>
+            </a:solidFill>
+            <a:prstDash val="solid"/>
+          </a:ln>
+        </p:spPr>
+      </p:sp>
+      <p:sp>
+        <p:nvSpPr>
+          <p:cNvPr id="27" name="Text 23"/>
+          <p:cNvSpPr txBox="1"/>
+          <p:nvPr/>
+        </p:nvSpPr>
+        <p:spPr>
+          <a:xfrm>
+            <a:off x="7406640" y="3657600"/>
+            <a:ext cx="1188720" cy="274320"/>
+          </a:xfrm>
+          <a:prstGeom prst="rect">
+            <a:avLst/>
+          </a:prstGeom>
+          <a:noFill/>
+          <a:ln/>
+        </p:spPr>
+        <p:txBody>
+          <a:bodyPr wrap="square" lIns="0" tIns="0" rIns="0" bIns="0" rtlCol="0" anchor="ctr"/>
+          <a:lstStyle/>
+          <a:p>
+            <a:pPr indent="0" marL="0">
+              <a:buNone/>
+            </a:pPr>
+            <a:r>
+              <a:rPr lang="en-US" sz="1200" dirty="0">
+                <a:solidFill>
+                  <a:schemeClr val="tx1"/>
+                </a:solidFill>
+              </a:rPr>
+              <a:t>disabled</a:t>
+            </a:r>
+            <a:endParaRPr lang="en-US" sz="1200" dirty="0"/>
+          </a:p>
+        </p:txBody>
+      </p:sp>
+      <p:sp>
+        <p:nvSpPr>
+          <p:cNvPr id="28" name="Text 24"/>
+          <p:cNvSpPr txBox="1"/>
+          <p:nvPr/>
+        </p:nvSpPr>
+        <p:spPr>
+          <a:xfrm>
+            <a:off x="457200" y="4160520"/>
+            <a:ext cx="8229600" cy="365760"/>
+          </a:xfrm>
+          <a:prstGeom prst="rect">
+            <a:avLst/>
+          </a:prstGeom>
+          <a:noFill/>
+          <a:ln/>
+        </p:spPr>
+        <p:txBody>
+          <a:bodyPr wrap="square" lIns="0" tIns="0" rIns="0" bIns="0" rtlCol="0" anchor="t"/>
+          <a:lstStyle/>
+          <a:p>
+            <a:pPr indent="0" marL="0">
+              <a:buNone/>
+            </a:pPr>
+            <a:r>
+              <a:rPr lang="en-US" sz="1200" dirty="0">
+                <a:solidFill>
+                  <a:schemeClr val="tx2"/>
+                </a:solidFill>
+              </a:rPr>
+              <a:t>Device state: On · Off · Disabled · Unknown (gateway offline) · Not reported · Not connected</a:t>
+            </a:r>
+            <a:endParaRPr lang="en-US" sz="1200" dirty="0"/>
+          </a:p>
+        </p:txBody>
+      </p:sp>
       <p:sp>
         <p:nvSpPr>
           <p:cNvPr id="25" name="Slide Number Placeholder 0"/>
@@ -16557,8 +19199,8 @@
         </p:nvSpPr>
         <p:spPr>
           <a:xfrm>
-            <a:off x="457200" y="256032"/>
-            <a:ext cx="8229600" cy="566928"/>
+            <a:off x="548640" y="1828800"/>
+            <a:ext cx="8046720" cy="822960"/>
           </a:xfrm>
           <a:prstGeom prst="rect">
             <a:avLst/>
@@ -16567,93 +19209,62 @@
           <a:ln/>
         </p:spPr>
         <p:txBody>
-          <a:bodyPr wrap="square" lIns="0" tIns="0" rIns="0" bIns="0" rtlCol="0" anchor="ctr"/>
+          <a:bodyPr wrap="square" lIns="0" tIns="0" rIns="0" bIns="0" rtlCol="0" anchor="b"/>
           <a:lstStyle/>
           <a:p>
             <a:pPr algn="l" indent="0" marL="0">
               <a:buNone/>
             </a:pPr>
             <a:r>
-              <a:rPr lang="en-US" sz="2600" b="1" dirty="0">
+              <a:rPr lang="en-US" sz="3600" b="1" dirty="0">
                 <a:solidFill>
-                  <a:schemeClr val="tx1"/>
+                  <a:schemeClr val="bg1"/>
                 </a:solidFill>
                 <a:latin typeface="Cambria" pitchFamily="34" charset="0"/>
                 <a:ea typeface="Cambria" pitchFamily="34" charset="-122"/>
                 <a:cs typeface="Cambria" pitchFamily="34" charset="-120"/>
               </a:rPr>
-              <a:t>Gateway DB · monitoring, alerts, operations</a:t>
+              <a:t>Data structures</a:t>
             </a:r>
-            <a:endParaRPr lang="en-US" sz="2600" dirty="0"/>
+            <a:endParaRPr lang="en-US" sz="3600" dirty="0"/>
           </a:p>
         </p:txBody>
       </p:sp>
-      <p:pic>
-        <p:nvPicPr>
-          <p:cNvPr id="3" name="er-4-monitoring-alerts" descr="er-4-monitoring-alerts.png">    </p:cNvPr>
-          <p:cNvPicPr>
-            <a:picLocks noChangeAspect="1"/>
-          </p:cNvPicPr>
-          <p:nvPr/>
-        </p:nvPicPr>
-        <p:blipFill>
-          <a:blip r:embed="rId1"/>
-          <a:stretch>
-            <a:fillRect/>
-          </a:stretch>
-        </p:blipFill>
-        <p:spPr>
-          <a:xfrm>
-            <a:off x="1615924" y="868680"/>
-            <a:ext cx="5912151" cy="3886200"/>
+      <p:sp>
+        <p:nvSpPr>
+          <p:cNvPr id="3" name="Text 0"/>
+          <p:cNvSpPr/>
+          <p:nvPr>
+            <p:ph idx="101" type="body" hasCustomPrompt="1"/>
+          </p:nvPr>
+        </p:nvSpPr>
+        <p:spPr>
+          <a:xfrm>
+            <a:off x="548640" y="2743200"/>
+            <a:ext cx="8046720" cy="731520"/>
           </a:xfrm>
           <a:prstGeom prst="rect">
             <a:avLst/>
           </a:prstGeom>
-        </p:spPr>
-      </p:pic>
-      <p:sp>
-        <p:nvSpPr>
-          <p:cNvPr id="25" name="Slide Number Placeholder 0"/>
-          <p:cNvSpPr>
-            <a:spLocks noGrp="1"/>
-          </p:cNvSpPr>
-          <p:nvPr>
-            <p:ph type="sldNum" sz="quarter" idx="4294967295"/>
-          </p:nvPr>
-        </p:nvSpPr>
-        <p:spPr>
-          <a:xfrm>
-            <a:off x="8229600" y="4800600"/>
-            <a:ext cx="457200" cy="228600"/>
-          </a:xfrm>
-          <a:prstGeom prst="rect">
-            <a:avLst/>
-          </a:prstGeom>
-          <a:extLst>
-            <a:ext uri="{C572A759-6A51-4108-AA02-DFA0A04FC94B}">
-              <ma14:wrappingTextBoxFlag xmlns:ma14="http://schemas.microsoft.com/office/mac/drawingml/2011/main" val="0"/>
-            </a:ext>
-          </a:extLst>
+          <a:noFill/>
+          <a:ln/>
         </p:spPr>
         <p:txBody>
-          <a:bodyPr/>
-          <a:lstStyle>
-            <a:lvl1pPr>
-              <a:defRPr sz="900">
+          <a:bodyPr wrap="square" lIns="0" tIns="0" rIns="0" bIns="0" rtlCol="0" anchor="t"/>
+          <a:lstStyle/>
+          <a:p>
+            <a:pPr algn="l" indent="0" marL="0">
+              <a:buNone/>
+            </a:pPr>
+            <a:r>
+              <a:rPr lang="en-US" sz="1600" dirty="0">
                 <a:solidFill>
-                  <a:schemeClr val="tx2"/>
+                  <a:schemeClr val="bg2"/>
                 </a:solidFill>
-              </a:defRPr>
-            </a:lvl1pPr>
-          </a:lstStyle>
-          <a:p>
-            <a:pPr algn="r"/>
-            <a:fld id="{F7021451-1387-4CA6-816F-3879F97B5CBC}" type="slidenum">
-              <a:rPr b="0" lang="en-US"/>
-              <a:t>24</a:t>
-            </a:fld>
-            <a:endParaRPr lang="en-US"/>
+              </a:rPr>
+              <a:t>Relational diagrams · solid = foreign key · dashed = logical link</a:t>
+            </a:r>
+            <a:endParaRPr lang="en-US" sz="1600" dirty="0"/>
           </a:p>
         </p:txBody>
       </p:sp>
@@ -16717,7 +19328,7 @@
                 <a:ea typeface="Cambria" pitchFamily="34" charset="-122"/>
                 <a:cs typeface="Cambria" pitchFamily="34" charset="-120"/>
               </a:rPr>
-              <a:t>Canopy DB · gateway configuration and alerts</a:t>
+              <a:t>Gateway DB · device registry</a:t>
             </a:r>
             <a:endParaRPr lang="en-US" sz="2600" dirty="0"/>
           </a:p>
@@ -16725,7 +19336,7 @@
       </p:sp>
       <p:pic>
         <p:nvPicPr>
-          <p:cNvPr id="3" name="er-5-canopy-gateway" descr="er-5-canopy-gateway.png">    </p:cNvPr>
+          <p:cNvPr id="3" name="er-1-device-registry" descr="er-1-device-registry.png">    </p:cNvPr>
           <p:cNvPicPr>
             <a:picLocks noChangeAspect="1"/>
           </p:cNvPicPr>
@@ -16739,8 +19350,8 @@
         </p:blipFill>
         <p:spPr>
           <a:xfrm>
-            <a:off x="1477489" y="868680"/>
-            <a:ext cx="6189022" cy="3886200"/>
+            <a:off x="1202772" y="868680"/>
+            <a:ext cx="6738457" cy="3886200"/>
           </a:xfrm>
           <a:prstGeom prst="rect">
             <a:avLst/>
@@ -16852,7 +19463,7 @@
                 <a:ea typeface="Cambria" pitchFamily="34" charset="-122"/>
                 <a:cs typeface="Cambria" pitchFamily="34" charset="-120"/>
               </a:rPr>
-              <a:t>Haber SQLite · gateway registry and releases</a:t>
+              <a:t>Gateway DB · licence, site, Canopy link, users</a:t>
             </a:r>
             <a:endParaRPr lang="en-US" sz="2600" dirty="0"/>
           </a:p>
@@ -16860,7 +19471,7 @@
       </p:sp>
       <p:pic>
         <p:nvPicPr>
-          <p:cNvPr id="3" name="er-6-haber" descr="er-6-haber.png">    </p:cNvPr>
+          <p:cNvPr id="3" name="er-2-license-site-auth" descr="er-2-license-site-auth.png">    </p:cNvPr>
           <p:cNvPicPr>
             <a:picLocks noChangeAspect="1"/>
           </p:cNvPicPr>
@@ -16874,8 +19485,8 @@
         </p:blipFill>
         <p:spPr>
           <a:xfrm>
-            <a:off x="698431" y="868680"/>
-            <a:ext cx="7747138" cy="3886200"/>
+            <a:off x="1759618" y="868680"/>
+            <a:ext cx="5624763" cy="3886200"/>
           </a:xfrm>
           <a:prstGeom prst="rect">
             <a:avLst/>
@@ -16987,7 +19598,7 @@
                 <a:ea typeface="Cambria" pitchFamily="34" charset="-122"/>
                 <a:cs typeface="Cambria" pitchFamily="34" charset="-120"/>
               </a:rPr>
-              <a:t>Kafka topics · message envelopes</a:t>
+              <a:t>Gateway DB · observations (time series)</a:t>
             </a:r>
             <a:endParaRPr lang="en-US" sz="2600" dirty="0"/>
           </a:p>
@@ -16995,7 +19606,7 @@
       </p:sp>
       <p:pic>
         <p:nvPicPr>
-          <p:cNvPr id="3" name="er-7-kafka-messages" descr="er-7-kafka-messages.png">    </p:cNvPr>
+          <p:cNvPr id="3" name="er-3-observations" descr="er-3-observations.png">    </p:cNvPr>
           <p:cNvPicPr>
             <a:picLocks noChangeAspect="1"/>
           </p:cNvPicPr>
@@ -17009,8 +19620,8 @@
         </p:blipFill>
         <p:spPr>
           <a:xfrm>
-            <a:off x="808738" y="868680"/>
-            <a:ext cx="7526524" cy="3886200"/>
+            <a:off x="1438517" y="868680"/>
+            <a:ext cx="6266966" cy="3886200"/>
           </a:xfrm>
           <a:prstGeom prst="rect">
             <a:avLst/>
@@ -17122,6 +19733,1532 @@
                 <a:ea typeface="Cambria" pitchFamily="34" charset="-122"/>
                 <a:cs typeface="Cambria" pitchFamily="34" charset="-120"/>
               </a:rPr>
+              <a:t>Gateway DB · monitoring, alerts, operations</a:t>
+            </a:r>
+            <a:endParaRPr lang="en-US" sz="2600" dirty="0"/>
+          </a:p>
+        </p:txBody>
+      </p:sp>
+      <p:pic>
+        <p:nvPicPr>
+          <p:cNvPr id="3" name="er-4-monitoring-alerts" descr="er-4-monitoring-alerts.png">    </p:cNvPr>
+          <p:cNvPicPr>
+            <a:picLocks noChangeAspect="1"/>
+          </p:cNvPicPr>
+          <p:nvPr/>
+        </p:nvPicPr>
+        <p:blipFill>
+          <a:blip r:embed="rId1"/>
+          <a:stretch>
+            <a:fillRect/>
+          </a:stretch>
+        </p:blipFill>
+        <p:spPr>
+          <a:xfrm>
+            <a:off x="1615924" y="868680"/>
+            <a:ext cx="5912151" cy="3886200"/>
+          </a:xfrm>
+          <a:prstGeom prst="rect">
+            <a:avLst/>
+          </a:prstGeom>
+        </p:spPr>
+      </p:pic>
+      <p:sp>
+        <p:nvSpPr>
+          <p:cNvPr id="25" name="Slide Number Placeholder 0"/>
+          <p:cNvSpPr>
+            <a:spLocks noGrp="1"/>
+          </p:cNvSpPr>
+          <p:nvPr>
+            <p:ph type="sldNum" sz="quarter" idx="4294967295"/>
+          </p:nvPr>
+        </p:nvSpPr>
+        <p:spPr>
+          <a:xfrm>
+            <a:off x="8229600" y="4800600"/>
+            <a:ext cx="457200" cy="228600"/>
+          </a:xfrm>
+          <a:prstGeom prst="rect">
+            <a:avLst/>
+          </a:prstGeom>
+          <a:extLst>
+            <a:ext uri="{C572A759-6A51-4108-AA02-DFA0A04FC94B}">
+              <ma14:wrappingTextBoxFlag xmlns:ma14="http://schemas.microsoft.com/office/mac/drawingml/2011/main" val="0"/>
+            </a:ext>
+          </a:extLst>
+        </p:spPr>
+        <p:txBody>
+          <a:bodyPr/>
+          <a:lstStyle>
+            <a:lvl1pPr>
+              <a:defRPr sz="900">
+                <a:solidFill>
+                  <a:schemeClr val="tx2"/>
+                </a:solidFill>
+              </a:defRPr>
+            </a:lvl1pPr>
+          </a:lstStyle>
+          <a:p>
+            <a:pPr algn="r"/>
+            <a:fld id="{F7021451-1387-4CA6-816F-3879F97B5CBC}" type="slidenum">
+              <a:rPr b="0" lang="en-US"/>
+              <a:t>28</a:t>
+            </a:fld>
+            <a:endParaRPr lang="en-US"/>
+          </a:p>
+        </p:txBody>
+      </p:sp>
+    </p:spTree>
+  </p:cSld>
+  <p:clrMapOvr>
+    <a:masterClrMapping/>
+  </p:clrMapOvr>
+</p:sld>
+</file>
+
+<file path=ppt/slides/slide29.xml><?xml version="1.0" encoding="utf-8"?>
+<p:sld xmlns:a="http://schemas.openxmlformats.org/drawingml/2006/main" xmlns:r="http://schemas.openxmlformats.org/officeDocument/2006/relationships" xmlns:p="http://schemas.openxmlformats.org/presentationml/2006/main">
+  <p:cSld name="Slide 29">
+    <p:spTree>
+      <p:nvGrpSpPr>
+        <p:cNvPr id="1" name=""/>
+        <p:cNvGrpSpPr/>
+        <p:nvPr/>
+      </p:nvGrpSpPr>
+      <p:grpSpPr>
+        <a:xfrm>
+          <a:off x="0" y="0"/>
+          <a:ext cx="0" cy="0"/>
+          <a:chOff x="0" y="0"/>
+          <a:chExt cx="0" cy="0"/>
+        </a:xfrm>
+      </p:grpSpPr>
+      <p:sp>
+        <p:nvSpPr>
+          <p:cNvPr id="2" name="Text 0"/>
+          <p:cNvSpPr/>
+          <p:nvPr>
+            <p:ph idx="100" type="title" hasCustomPrompt="1"/>
+          </p:nvPr>
+        </p:nvSpPr>
+        <p:spPr>
+          <a:xfrm>
+            <a:off x="457200" y="256032"/>
+            <a:ext cx="8229600" cy="566928"/>
+          </a:xfrm>
+          <a:prstGeom prst="rect">
+            <a:avLst/>
+          </a:prstGeom>
+          <a:noFill/>
+          <a:ln/>
+        </p:spPr>
+        <p:txBody>
+          <a:bodyPr wrap="square" lIns="0" tIns="0" rIns="0" bIns="0" rtlCol="0" anchor="ctr"/>
+          <a:lstStyle/>
+          <a:p>
+            <a:pPr algn="l" indent="0" marL="0">
+              <a:buNone/>
+            </a:pPr>
+            <a:r>
+              <a:rPr lang="en-US" sz="2600" b="1" dirty="0">
+                <a:solidFill>
+                  <a:schemeClr val="tx1"/>
+                </a:solidFill>
+                <a:latin typeface="Cambria" pitchFamily="34" charset="0"/>
+                <a:ea typeface="Cambria" pitchFamily="34" charset="-122"/>
+                <a:cs typeface="Cambria" pitchFamily="34" charset="-120"/>
+              </a:rPr>
+              <a:t>Gateway DB · device activity and on/off events</a:t>
+            </a:r>
+            <a:endParaRPr lang="en-US" sz="2600" dirty="0"/>
+          </a:p>
+        </p:txBody>
+      </p:sp>
+      <p:pic>
+        <p:nvPicPr>
+          <p:cNvPr id="3" name="er-8-gateway-activity" descr="er-8-gateway-activity.png">    </p:cNvPr>
+          <p:cNvPicPr>
+            <a:picLocks noChangeAspect="1"/>
+          </p:cNvPicPr>
+          <p:nvPr/>
+        </p:nvPicPr>
+        <p:blipFill>
+          <a:blip r:embed="rId1"/>
+          <a:stretch>
+            <a:fillRect/>
+          </a:stretch>
+        </p:blipFill>
+        <p:spPr>
+          <a:xfrm>
+            <a:off x="878186" y="868680"/>
+            <a:ext cx="7387628" cy="3886200"/>
+          </a:xfrm>
+          <a:prstGeom prst="rect">
+            <a:avLst/>
+          </a:prstGeom>
+        </p:spPr>
+      </p:pic>
+      <p:sp>
+        <p:nvSpPr>
+          <p:cNvPr id="25" name="Slide Number Placeholder 0"/>
+          <p:cNvSpPr>
+            <a:spLocks noGrp="1"/>
+          </p:cNvSpPr>
+          <p:nvPr>
+            <p:ph type="sldNum" sz="quarter" idx="4294967295"/>
+          </p:nvPr>
+        </p:nvSpPr>
+        <p:spPr>
+          <a:xfrm>
+            <a:off x="8229600" y="4800600"/>
+            <a:ext cx="457200" cy="228600"/>
+          </a:xfrm>
+          <a:prstGeom prst="rect">
+            <a:avLst/>
+          </a:prstGeom>
+          <a:extLst>
+            <a:ext uri="{C572A759-6A51-4108-AA02-DFA0A04FC94B}">
+              <ma14:wrappingTextBoxFlag xmlns:ma14="http://schemas.microsoft.com/office/mac/drawingml/2011/main" val="0"/>
+            </a:ext>
+          </a:extLst>
+        </p:spPr>
+        <p:txBody>
+          <a:bodyPr/>
+          <a:lstStyle>
+            <a:lvl1pPr>
+              <a:defRPr sz="900">
+                <a:solidFill>
+                  <a:schemeClr val="tx2"/>
+                </a:solidFill>
+              </a:defRPr>
+            </a:lvl1pPr>
+          </a:lstStyle>
+          <a:p>
+            <a:pPr algn="r"/>
+            <a:fld id="{F7021451-1387-4CA6-816F-3879F97B5CBC}" type="slidenum">
+              <a:rPr b="0" lang="en-US"/>
+              <a:t>29</a:t>
+            </a:fld>
+            <a:endParaRPr lang="en-US"/>
+          </a:p>
+        </p:txBody>
+      </p:sp>
+    </p:spTree>
+  </p:cSld>
+  <p:clrMapOvr>
+    <a:masterClrMapping/>
+  </p:clrMapOvr>
+</p:sld>
+</file>
+
+<file path=ppt/slides/slide3.xml><?xml version="1.0" encoding="utf-8"?>
+<p:sld xmlns:a="http://schemas.openxmlformats.org/drawingml/2006/main" xmlns:r="http://schemas.openxmlformats.org/officeDocument/2006/relationships" xmlns:p="http://schemas.openxmlformats.org/presentationml/2006/main">
+  <p:cSld name="Slide 3">
+    <p:spTree>
+      <p:nvGrpSpPr>
+        <p:cNvPr id="1" name=""/>
+        <p:cNvGrpSpPr/>
+        <p:nvPr/>
+      </p:nvGrpSpPr>
+      <p:grpSpPr>
+        <a:xfrm>
+          <a:off x="0" y="0"/>
+          <a:ext cx="0" cy="0"/>
+          <a:chOff x="0" y="0"/>
+          <a:chExt cx="0" cy="0"/>
+        </a:xfrm>
+      </p:grpSpPr>
+      <p:sp>
+        <p:nvSpPr>
+          <p:cNvPr id="2" name="Text 0"/>
+          <p:cNvSpPr/>
+          <p:nvPr>
+            <p:ph idx="100" type="title" hasCustomPrompt="1"/>
+          </p:nvPr>
+        </p:nvSpPr>
+        <p:spPr>
+          <a:xfrm>
+            <a:off x="457200" y="256032"/>
+            <a:ext cx="8229600" cy="566928"/>
+          </a:xfrm>
+          <a:prstGeom prst="rect">
+            <a:avLst/>
+          </a:prstGeom>
+          <a:noFill/>
+          <a:ln/>
+        </p:spPr>
+        <p:txBody>
+          <a:bodyPr wrap="square" lIns="0" tIns="0" rIns="0" bIns="0" rtlCol="0" anchor="ctr"/>
+          <a:lstStyle/>
+          <a:p>
+            <a:pPr algn="l" indent="0" marL="0">
+              <a:buNone/>
+            </a:pPr>
+            <a:r>
+              <a:rPr lang="en-US" sz="2600" b="1" dirty="0">
+                <a:solidFill>
+                  <a:schemeClr val="tx1"/>
+                </a:solidFill>
+                <a:latin typeface="Cambria" pitchFamily="34" charset="0"/>
+                <a:ea typeface="Cambria" pitchFamily="34" charset="-122"/>
+                <a:cs typeface="Cambria" pitchFamily="34" charset="-120"/>
+              </a:rPr>
+              <a:t>From device signal to charted observation</a:t>
+            </a:r>
+            <a:endParaRPr lang="en-US" sz="2600" dirty="0"/>
+          </a:p>
+        </p:txBody>
+      </p:sp>
+      <p:sp>
+        <p:nvSpPr>
+          <p:cNvPr id="3" name="icon-dot"/>
+          <p:cNvSpPr/>
+          <p:nvPr/>
+        </p:nvSpPr>
+        <p:spPr>
+          <a:xfrm>
+            <a:off x="548640" y="1051560"/>
+            <a:ext cx="457200" cy="457200"/>
+          </a:xfrm>
+          <a:prstGeom prst="ellipse">
+            <a:avLst/>
+          </a:prstGeom>
+          <a:solidFill>
+            <a:schemeClr val="accent1"/>
+          </a:solidFill>
+          <a:ln w="12700">
+            <a:solidFill>
+              <a:schemeClr val="accent1"/>
+            </a:solidFill>
+            <a:prstDash val="solid"/>
+          </a:ln>
+        </p:spPr>
+      </p:sp>
+      <p:pic>
+        <p:nvPicPr>
+          <p:cNvPr id="4" name="icon" descr="preencoded.png">    </p:cNvPr>
+          <p:cNvPicPr>
+            <a:picLocks noChangeAspect="1"/>
+          </p:cNvPicPr>
+          <p:nvPr/>
+        </p:nvPicPr>
+        <p:blipFill>
+          <a:blip r:embed="rId1"/>
+          <a:stretch>
+            <a:fillRect/>
+          </a:stretch>
+        </p:blipFill>
+        <p:spPr>
+          <a:xfrm>
+            <a:off x="658368" y="1161288"/>
+            <a:ext cx="237744" cy="237744"/>
+          </a:xfrm>
+          <a:prstGeom prst="rect">
+            <a:avLst/>
+          </a:prstGeom>
+        </p:spPr>
+      </p:pic>
+      <p:sp>
+        <p:nvSpPr>
+          <p:cNvPr id="5" name="Text 2"/>
+          <p:cNvSpPr txBox="1"/>
+          <p:nvPr/>
+        </p:nvSpPr>
+        <p:spPr>
+          <a:xfrm>
+            <a:off x="1188720" y="1097280"/>
+            <a:ext cx="1737360" cy="365760"/>
+          </a:xfrm>
+          <a:prstGeom prst="rect">
+            <a:avLst/>
+          </a:prstGeom>
+          <a:noFill/>
+          <a:ln/>
+        </p:spPr>
+        <p:txBody>
+          <a:bodyPr wrap="square" lIns="0" tIns="0" rIns="0" bIns="0" rtlCol="0" anchor="ctr"/>
+          <a:lstStyle/>
+          <a:p>
+            <a:pPr indent="0" marL="0">
+              <a:buNone/>
+            </a:pPr>
+            <a:r>
+              <a:rPr lang="en-US" sz="1700" b="1" dirty="0">
+                <a:solidFill>
+                  <a:schemeClr val="tx1"/>
+                </a:solidFill>
+              </a:rPr>
+              <a:t>Connect</a:t>
+            </a:r>
+            <a:endParaRPr lang="en-US" sz="1700" dirty="0"/>
+          </a:p>
+        </p:txBody>
+      </p:sp>
+      <p:sp>
+        <p:nvSpPr>
+          <p:cNvPr id="6" name="Text 3"/>
+          <p:cNvSpPr txBox="1"/>
+          <p:nvPr/>
+        </p:nvSpPr>
+        <p:spPr>
+          <a:xfrm>
+            <a:off x="2926080" y="1097280"/>
+            <a:ext cx="5760720" cy="365760"/>
+          </a:xfrm>
+          <a:prstGeom prst="rect">
+            <a:avLst/>
+          </a:prstGeom>
+          <a:noFill/>
+          <a:ln/>
+        </p:spPr>
+        <p:txBody>
+          <a:bodyPr wrap="square" lIns="0" tIns="0" rIns="0" bIns="0" rtlCol="0" anchor="ctr"/>
+          <a:lstStyle/>
+          <a:p>
+            <a:pPr indent="0" marL="0">
+              <a:buNone/>
+            </a:pPr>
+            <a:r>
+              <a:rPr lang="en-US" sz="1400" dirty="0">
+                <a:solidFill>
+                  <a:schemeClr val="tx1"/>
+                </a:solidFill>
+              </a:rPr>
+              <a:t>RS-232, HL7 v2 / MLLP, UDP multicast, TCP and HTTP poll / push</a:t>
+            </a:r>
+            <a:endParaRPr lang="en-US" sz="1400" dirty="0"/>
+          </a:p>
+        </p:txBody>
+      </p:sp>
+      <p:sp>
+        <p:nvSpPr>
+          <p:cNvPr id="7" name="icon-dot"/>
+          <p:cNvSpPr/>
+          <p:nvPr/>
+        </p:nvSpPr>
+        <p:spPr>
+          <a:xfrm>
+            <a:off x="548640" y="1783080"/>
+            <a:ext cx="457200" cy="457200"/>
+          </a:xfrm>
+          <a:prstGeom prst="ellipse">
+            <a:avLst/>
+          </a:prstGeom>
+          <a:solidFill>
+            <a:schemeClr val="accent2"/>
+          </a:solidFill>
+          <a:ln w="12700">
+            <a:solidFill>
+              <a:schemeClr val="accent2"/>
+            </a:solidFill>
+            <a:prstDash val="solid"/>
+          </a:ln>
+        </p:spPr>
+      </p:sp>
+      <p:pic>
+        <p:nvPicPr>
+          <p:cNvPr id="8" name="icon" descr="preencoded.png">    </p:cNvPr>
+          <p:cNvPicPr>
+            <a:picLocks noChangeAspect="1"/>
+          </p:cNvPicPr>
+          <p:nvPr/>
+        </p:nvPicPr>
+        <p:blipFill>
+          <a:blip r:embed="rId2"/>
+          <a:stretch>
+            <a:fillRect/>
+          </a:stretch>
+        </p:blipFill>
+        <p:spPr>
+          <a:xfrm>
+            <a:off x="658368" y="1892808"/>
+            <a:ext cx="237744" cy="237744"/>
+          </a:xfrm>
+          <a:prstGeom prst="rect">
+            <a:avLst/>
+          </a:prstGeom>
+        </p:spPr>
+      </p:pic>
+      <p:sp>
+        <p:nvSpPr>
+          <p:cNvPr id="9" name="Text 5"/>
+          <p:cNvSpPr txBox="1"/>
+          <p:nvPr/>
+        </p:nvSpPr>
+        <p:spPr>
+          <a:xfrm>
+            <a:off x="1188720" y="1828800"/>
+            <a:ext cx="1737360" cy="365760"/>
+          </a:xfrm>
+          <a:prstGeom prst="rect">
+            <a:avLst/>
+          </a:prstGeom>
+          <a:noFill/>
+          <a:ln/>
+        </p:spPr>
+        <p:txBody>
+          <a:bodyPr wrap="square" lIns="0" tIns="0" rIns="0" bIns="0" rtlCol="0" anchor="ctr"/>
+          <a:lstStyle/>
+          <a:p>
+            <a:pPr indent="0" marL="0">
+              <a:buNone/>
+            </a:pPr>
+            <a:r>
+              <a:rPr lang="en-US" sz="1700" b="1" dirty="0">
+                <a:solidFill>
+                  <a:schemeClr val="tx1"/>
+                </a:solidFill>
+              </a:rPr>
+              <a:t>Parse</a:t>
+            </a:r>
+            <a:endParaRPr lang="en-US" sz="1700" dirty="0"/>
+          </a:p>
+        </p:txBody>
+      </p:sp>
+      <p:sp>
+        <p:nvSpPr>
+          <p:cNvPr id="10" name="Text 6"/>
+          <p:cNvSpPr txBox="1"/>
+          <p:nvPr/>
+        </p:nvSpPr>
+        <p:spPr>
+          <a:xfrm>
+            <a:off x="2926080" y="1828800"/>
+            <a:ext cx="5760720" cy="365760"/>
+          </a:xfrm>
+          <a:prstGeom prst="rect">
+            <a:avLst/>
+          </a:prstGeom>
+          <a:noFill/>
+          <a:ln/>
+        </p:spPr>
+        <p:txBody>
+          <a:bodyPr wrap="square" lIns="0" tIns="0" rIns="0" bIns="0" rtlCol="0" anchor="ctr"/>
+          <a:lstStyle/>
+          <a:p>
+            <a:pPr indent="0" marL="0">
+              <a:buNone/>
+            </a:pPr>
+            <a:r>
+              <a:rPr lang="en-US" sz="1400" dirty="0">
+                <a:solidFill>
+                  <a:schemeClr val="tx1"/>
+                </a:solidFill>
+              </a:rPr>
+              <a:t>One isolated parser container per device produces Flora observations</a:t>
+            </a:r>
+            <a:endParaRPr lang="en-US" sz="1400" dirty="0"/>
+          </a:p>
+        </p:txBody>
+      </p:sp>
+      <p:sp>
+        <p:nvSpPr>
+          <p:cNvPr id="11" name="icon-dot"/>
+          <p:cNvSpPr/>
+          <p:nvPr/>
+        </p:nvSpPr>
+        <p:spPr>
+          <a:xfrm>
+            <a:off x="548640" y="2514600"/>
+            <a:ext cx="457200" cy="457200"/>
+          </a:xfrm>
+          <a:prstGeom prst="ellipse">
+            <a:avLst/>
+          </a:prstGeom>
+          <a:solidFill>
+            <a:schemeClr val="accent1"/>
+          </a:solidFill>
+          <a:ln w="12700">
+            <a:solidFill>
+              <a:schemeClr val="accent1"/>
+            </a:solidFill>
+            <a:prstDash val="solid"/>
+          </a:ln>
+        </p:spPr>
+      </p:sp>
+      <p:pic>
+        <p:nvPicPr>
+          <p:cNvPr id="12" name="icon" descr="preencoded.png">    </p:cNvPr>
+          <p:cNvPicPr>
+            <a:picLocks noChangeAspect="1"/>
+          </p:cNvPicPr>
+          <p:nvPr/>
+        </p:nvPicPr>
+        <p:blipFill>
+          <a:blip r:embed="rId3"/>
+          <a:stretch>
+            <a:fillRect/>
+          </a:stretch>
+        </p:blipFill>
+        <p:spPr>
+          <a:xfrm>
+            <a:off x="658368" y="2624328"/>
+            <a:ext cx="237744" cy="237744"/>
+          </a:xfrm>
+          <a:prstGeom prst="rect">
+            <a:avLst/>
+          </a:prstGeom>
+        </p:spPr>
+      </p:pic>
+      <p:sp>
+        <p:nvSpPr>
+          <p:cNvPr id="13" name="Text 8"/>
+          <p:cNvSpPr txBox="1"/>
+          <p:nvPr/>
+        </p:nvSpPr>
+        <p:spPr>
+          <a:xfrm>
+            <a:off x="1188720" y="2560320"/>
+            <a:ext cx="1737360" cy="365760"/>
+          </a:xfrm>
+          <a:prstGeom prst="rect">
+            <a:avLst/>
+          </a:prstGeom>
+          <a:noFill/>
+          <a:ln/>
+        </p:spPr>
+        <p:txBody>
+          <a:bodyPr wrap="square" lIns="0" tIns="0" rIns="0" bIns="0" rtlCol="0" anchor="ctr"/>
+          <a:lstStyle/>
+          <a:p>
+            <a:pPr indent="0" marL="0">
+              <a:buNone/>
+            </a:pPr>
+            <a:r>
+              <a:rPr lang="en-US" sz="1700" b="1" dirty="0">
+                <a:solidFill>
+                  <a:schemeClr val="tx1"/>
+                </a:solidFill>
+              </a:rPr>
+              <a:t>Store &amp; serve</a:t>
+            </a:r>
+            <a:endParaRPr lang="en-US" sz="1700" dirty="0"/>
+          </a:p>
+        </p:txBody>
+      </p:sp>
+      <p:sp>
+        <p:nvSpPr>
+          <p:cNvPr id="14" name="Text 9"/>
+          <p:cNvSpPr txBox="1"/>
+          <p:nvPr/>
+        </p:nvSpPr>
+        <p:spPr>
+          <a:xfrm>
+            <a:off x="2926080" y="2560320"/>
+            <a:ext cx="5760720" cy="365760"/>
+          </a:xfrm>
+          <a:prstGeom prst="rect">
+            <a:avLst/>
+          </a:prstGeom>
+          <a:noFill/>
+          <a:ln/>
+        </p:spPr>
+        <p:txBody>
+          <a:bodyPr wrap="square" lIns="0" tIns="0" rIns="0" bIns="0" rtlCol="0" anchor="ctr"/>
+          <a:lstStyle/>
+          <a:p>
+            <a:pPr indent="0" marL="0">
+              <a:buNone/>
+            </a:pPr>
+            <a:r>
+              <a:rPr lang="en-US" sz="1400" dirty="0">
+                <a:solidFill>
+                  <a:schemeClr val="tx1"/>
+                </a:solidFill>
+              </a:rPr>
+              <a:t>Local PostgreSQL store; each Leaf reads its own devices via the data-api</a:t>
+            </a:r>
+            <a:endParaRPr lang="en-US" sz="1400" dirty="0"/>
+          </a:p>
+        </p:txBody>
+      </p:sp>
+      <p:sp>
+        <p:nvSpPr>
+          <p:cNvPr id="15" name="icon-dot"/>
+          <p:cNvSpPr/>
+          <p:nvPr/>
+        </p:nvSpPr>
+        <p:spPr>
+          <a:xfrm>
+            <a:off x="548640" y="3246120"/>
+            <a:ext cx="457200" cy="457200"/>
+          </a:xfrm>
+          <a:prstGeom prst="ellipse">
+            <a:avLst/>
+          </a:prstGeom>
+          <a:solidFill>
+            <a:schemeClr val="accent2"/>
+          </a:solidFill>
+          <a:ln w="12700">
+            <a:solidFill>
+              <a:schemeClr val="accent2"/>
+            </a:solidFill>
+            <a:prstDash val="solid"/>
+          </a:ln>
+        </p:spPr>
+      </p:sp>
+      <p:pic>
+        <p:nvPicPr>
+          <p:cNvPr id="16" name="icon" descr="preencoded.png">    </p:cNvPr>
+          <p:cNvPicPr>
+            <a:picLocks noChangeAspect="1"/>
+          </p:cNvPicPr>
+          <p:nvPr/>
+        </p:nvPicPr>
+        <p:blipFill>
+          <a:blip r:embed="rId4"/>
+          <a:stretch>
+            <a:fillRect/>
+          </a:stretch>
+        </p:blipFill>
+        <p:spPr>
+          <a:xfrm>
+            <a:off x="658368" y="3355848"/>
+            <a:ext cx="237744" cy="237744"/>
+          </a:xfrm>
+          <a:prstGeom prst="rect">
+            <a:avLst/>
+          </a:prstGeom>
+        </p:spPr>
+      </p:pic>
+      <p:sp>
+        <p:nvSpPr>
+          <p:cNvPr id="17" name="Text 11"/>
+          <p:cNvSpPr txBox="1"/>
+          <p:nvPr/>
+        </p:nvSpPr>
+        <p:spPr>
+          <a:xfrm>
+            <a:off x="1188720" y="3291840"/>
+            <a:ext cx="1737360" cy="365760"/>
+          </a:xfrm>
+          <a:prstGeom prst="rect">
+            <a:avLst/>
+          </a:prstGeom>
+          <a:noFill/>
+          <a:ln/>
+        </p:spPr>
+        <p:txBody>
+          <a:bodyPr wrap="square" lIns="0" tIns="0" rIns="0" bIns="0" rtlCol="0" anchor="ctr"/>
+          <a:lstStyle/>
+          <a:p>
+            <a:pPr indent="0" marL="0">
+              <a:buNone/>
+            </a:pPr>
+            <a:r>
+              <a:rPr lang="en-US" sz="1700" b="1" dirty="0">
+                <a:solidFill>
+                  <a:schemeClr val="tx1"/>
+                </a:solidFill>
+              </a:rPr>
+              <a:t>Licence</a:t>
+            </a:r>
+            <a:endParaRPr lang="en-US" sz="1700" dirty="0"/>
+          </a:p>
+        </p:txBody>
+      </p:sp>
+      <p:sp>
+        <p:nvSpPr>
+          <p:cNvPr id="18" name="Text 12"/>
+          <p:cNvSpPr txBox="1"/>
+          <p:nvPr/>
+        </p:nvSpPr>
+        <p:spPr>
+          <a:xfrm>
+            <a:off x="2926080" y="3291840"/>
+            <a:ext cx="5760720" cy="365760"/>
+          </a:xfrm>
+          <a:prstGeom prst="rect">
+            <a:avLst/>
+          </a:prstGeom>
+          <a:noFill/>
+          <a:ln/>
+        </p:spPr>
+        <p:txBody>
+          <a:bodyPr wrap="square" lIns="0" tIns="0" rIns="0" bIns="0" rtlCol="0" anchor="ctr"/>
+          <a:lstStyle/>
+          <a:p>
+            <a:pPr indent="0" marL="0">
+              <a:buNone/>
+            </a:pPr>
+            <a:r>
+              <a:rPr lang="en-US" sz="1400" dirty="0">
+                <a:solidFill>
+                  <a:schemeClr val="tx1"/>
+                </a:solidFill>
+              </a:rPr>
+              <a:t>Device licence, catalogue and parser images come from Haber in Canopy</a:t>
+            </a:r>
+            <a:endParaRPr lang="en-US" sz="1400" dirty="0"/>
+          </a:p>
+        </p:txBody>
+      </p:sp>
+      <p:sp>
+        <p:nvSpPr>
+          <p:cNvPr id="19" name="icon-dot"/>
+          <p:cNvSpPr/>
+          <p:nvPr/>
+        </p:nvSpPr>
+        <p:spPr>
+          <a:xfrm>
+            <a:off x="548640" y="3977640"/>
+            <a:ext cx="457200" cy="457200"/>
+          </a:xfrm>
+          <a:prstGeom prst="ellipse">
+            <a:avLst/>
+          </a:prstGeom>
+          <a:solidFill>
+            <a:schemeClr val="accent1"/>
+          </a:solidFill>
+          <a:ln w="12700">
+            <a:solidFill>
+              <a:schemeClr val="accent1"/>
+            </a:solidFill>
+            <a:prstDash val="solid"/>
+          </a:ln>
+        </p:spPr>
+      </p:sp>
+      <p:pic>
+        <p:nvPicPr>
+          <p:cNvPr id="20" name="icon" descr="preencoded.png">    </p:cNvPr>
+          <p:cNvPicPr>
+            <a:picLocks noChangeAspect="1"/>
+          </p:cNvPicPr>
+          <p:nvPr/>
+        </p:nvPicPr>
+        <p:blipFill>
+          <a:blip r:embed="rId5"/>
+          <a:stretch>
+            <a:fillRect/>
+          </a:stretch>
+        </p:blipFill>
+        <p:spPr>
+          <a:xfrm>
+            <a:off x="658368" y="4087368"/>
+            <a:ext cx="237744" cy="237744"/>
+          </a:xfrm>
+          <a:prstGeom prst="rect">
+            <a:avLst/>
+          </a:prstGeom>
+        </p:spPr>
+      </p:pic>
+      <p:sp>
+        <p:nvSpPr>
+          <p:cNvPr id="21" name="Text 14"/>
+          <p:cNvSpPr txBox="1"/>
+          <p:nvPr/>
+        </p:nvSpPr>
+        <p:spPr>
+          <a:xfrm>
+            <a:off x="1188720" y="4023360"/>
+            <a:ext cx="1737360" cy="365760"/>
+          </a:xfrm>
+          <a:prstGeom prst="rect">
+            <a:avLst/>
+          </a:prstGeom>
+          <a:noFill/>
+          <a:ln/>
+        </p:spPr>
+        <p:txBody>
+          <a:bodyPr wrap="square" lIns="0" tIns="0" rIns="0" bIns="0" rtlCol="0" anchor="ctr"/>
+          <a:lstStyle/>
+          <a:p>
+            <a:pPr indent="0" marL="0">
+              <a:buNone/>
+            </a:pPr>
+            <a:r>
+              <a:rPr lang="en-US" sz="1700" b="1" dirty="0">
+                <a:solidFill>
+                  <a:schemeClr val="tx1"/>
+                </a:solidFill>
+              </a:rPr>
+              <a:t>Watch</a:t>
+            </a:r>
+            <a:endParaRPr lang="en-US" sz="1700" dirty="0"/>
+          </a:p>
+        </p:txBody>
+      </p:sp>
+      <p:sp>
+        <p:nvSpPr>
+          <p:cNvPr id="22" name="Text 15"/>
+          <p:cNvSpPr txBox="1"/>
+          <p:nvPr/>
+        </p:nvSpPr>
+        <p:spPr>
+          <a:xfrm>
+            <a:off x="2926080" y="4023360"/>
+            <a:ext cx="5760720" cy="365760"/>
+          </a:xfrm>
+          <a:prstGeom prst="rect">
+            <a:avLst/>
+          </a:prstGeom>
+          <a:noFill/>
+          <a:ln/>
+        </p:spPr>
+        <p:txBody>
+          <a:bodyPr wrap="square" lIns="0" tIns="0" rIns="0" bIns="0" rtlCol="0" anchor="ctr"/>
+          <a:lstStyle/>
+          <a:p>
+            <a:pPr indent="0" marL="0">
+              <a:buNone/>
+            </a:pPr>
+            <a:r>
+              <a:rPr lang="en-US" sz="1400" dirty="0">
+                <a:solidFill>
+                  <a:schemeClr val="tx1"/>
+                </a:solidFill>
+              </a:rPr>
+              <a:t>Status history for every lane, alerts pushed to Canopy</a:t>
+            </a:r>
+            <a:endParaRPr lang="en-US" sz="1400" dirty="0"/>
+          </a:p>
+        </p:txBody>
+      </p:sp>
+      <p:sp>
+        <p:nvSpPr>
+          <p:cNvPr id="25" name="Slide Number Placeholder 0"/>
+          <p:cNvSpPr>
+            <a:spLocks noGrp="1"/>
+          </p:cNvSpPr>
+          <p:nvPr>
+            <p:ph type="sldNum" sz="quarter" idx="4294967295"/>
+          </p:nvPr>
+        </p:nvSpPr>
+        <p:spPr>
+          <a:xfrm>
+            <a:off x="8229600" y="4800600"/>
+            <a:ext cx="457200" cy="228600"/>
+          </a:xfrm>
+          <a:prstGeom prst="rect">
+            <a:avLst/>
+          </a:prstGeom>
+          <a:extLst>
+            <a:ext uri="{C572A759-6A51-4108-AA02-DFA0A04FC94B}">
+              <ma14:wrappingTextBoxFlag xmlns:ma14="http://schemas.microsoft.com/office/mac/drawingml/2011/main" val="0"/>
+            </a:ext>
+          </a:extLst>
+        </p:spPr>
+        <p:txBody>
+          <a:bodyPr/>
+          <a:lstStyle>
+            <a:lvl1pPr>
+              <a:defRPr sz="900">
+                <a:solidFill>
+                  <a:schemeClr val="tx2"/>
+                </a:solidFill>
+              </a:defRPr>
+            </a:lvl1pPr>
+          </a:lstStyle>
+          <a:p>
+            <a:pPr algn="r"/>
+            <a:fld id="{F7021451-1387-4CA6-816F-3879F97B5CBC}" type="slidenum">
+              <a:rPr b="0" lang="en-US"/>
+              <a:t>3</a:t>
+            </a:fld>
+            <a:endParaRPr lang="en-US"/>
+          </a:p>
+        </p:txBody>
+      </p:sp>
+    </p:spTree>
+  </p:cSld>
+  <p:clrMapOvr>
+    <a:masterClrMapping/>
+  </p:clrMapOvr>
+</p:sld>
+</file>
+
+<file path=ppt/slides/slide30.xml><?xml version="1.0" encoding="utf-8"?>
+<p:sld xmlns:a="http://schemas.openxmlformats.org/drawingml/2006/main" xmlns:r="http://schemas.openxmlformats.org/officeDocument/2006/relationships" xmlns:p="http://schemas.openxmlformats.org/presentationml/2006/main">
+  <p:cSld name="Slide 30">
+    <p:spTree>
+      <p:nvGrpSpPr>
+        <p:cNvPr id="1" name=""/>
+        <p:cNvGrpSpPr/>
+        <p:nvPr/>
+      </p:nvGrpSpPr>
+      <p:grpSpPr>
+        <a:xfrm>
+          <a:off x="0" y="0"/>
+          <a:ext cx="0" cy="0"/>
+          <a:chOff x="0" y="0"/>
+          <a:chExt cx="0" cy="0"/>
+        </a:xfrm>
+      </p:grpSpPr>
+      <p:sp>
+        <p:nvSpPr>
+          <p:cNvPr id="2" name="Text 0"/>
+          <p:cNvSpPr/>
+          <p:nvPr>
+            <p:ph idx="100" type="title" hasCustomPrompt="1"/>
+          </p:nvPr>
+        </p:nvSpPr>
+        <p:spPr>
+          <a:xfrm>
+            <a:off x="457200" y="256032"/>
+            <a:ext cx="8229600" cy="566928"/>
+          </a:xfrm>
+          <a:prstGeom prst="rect">
+            <a:avLst/>
+          </a:prstGeom>
+          <a:noFill/>
+          <a:ln/>
+        </p:spPr>
+        <p:txBody>
+          <a:bodyPr wrap="square" lIns="0" tIns="0" rIns="0" bIns="0" rtlCol="0" anchor="ctr"/>
+          <a:lstStyle/>
+          <a:p>
+            <a:pPr algn="l" indent="0" marL="0">
+              <a:buNone/>
+            </a:pPr>
+            <a:r>
+              <a:rPr lang="en-US" sz="2600" b="1" dirty="0">
+                <a:solidFill>
+                  <a:schemeClr val="tx1"/>
+                </a:solidFill>
+                <a:latin typeface="Cambria" pitchFamily="34" charset="0"/>
+                <a:ea typeface="Cambria" pitchFamily="34" charset="-122"/>
+                <a:cs typeface="Cambria" pitchFamily="34" charset="-120"/>
+              </a:rPr>
+              <a:t>Canopy DB · gateway configuration and alerts</a:t>
+            </a:r>
+            <a:endParaRPr lang="en-US" sz="2600" dirty="0"/>
+          </a:p>
+        </p:txBody>
+      </p:sp>
+      <p:pic>
+        <p:nvPicPr>
+          <p:cNvPr id="3" name="er-5-canopy-gateway" descr="er-5-canopy-gateway.png">    </p:cNvPr>
+          <p:cNvPicPr>
+            <a:picLocks noChangeAspect="1"/>
+          </p:cNvPicPr>
+          <p:nvPr/>
+        </p:nvPicPr>
+        <p:blipFill>
+          <a:blip r:embed="rId1"/>
+          <a:stretch>
+            <a:fillRect/>
+          </a:stretch>
+        </p:blipFill>
+        <p:spPr>
+          <a:xfrm>
+            <a:off x="1477489" y="868680"/>
+            <a:ext cx="6189022" cy="3886200"/>
+          </a:xfrm>
+          <a:prstGeom prst="rect">
+            <a:avLst/>
+          </a:prstGeom>
+        </p:spPr>
+      </p:pic>
+      <p:sp>
+        <p:nvSpPr>
+          <p:cNvPr id="25" name="Slide Number Placeholder 0"/>
+          <p:cNvSpPr>
+            <a:spLocks noGrp="1"/>
+          </p:cNvSpPr>
+          <p:nvPr>
+            <p:ph type="sldNum" sz="quarter" idx="4294967295"/>
+          </p:nvPr>
+        </p:nvSpPr>
+        <p:spPr>
+          <a:xfrm>
+            <a:off x="8229600" y="4800600"/>
+            <a:ext cx="457200" cy="228600"/>
+          </a:xfrm>
+          <a:prstGeom prst="rect">
+            <a:avLst/>
+          </a:prstGeom>
+          <a:extLst>
+            <a:ext uri="{C572A759-6A51-4108-AA02-DFA0A04FC94B}">
+              <ma14:wrappingTextBoxFlag xmlns:ma14="http://schemas.microsoft.com/office/mac/drawingml/2011/main" val="0"/>
+            </a:ext>
+          </a:extLst>
+        </p:spPr>
+        <p:txBody>
+          <a:bodyPr/>
+          <a:lstStyle>
+            <a:lvl1pPr>
+              <a:defRPr sz="900">
+                <a:solidFill>
+                  <a:schemeClr val="tx2"/>
+                </a:solidFill>
+              </a:defRPr>
+            </a:lvl1pPr>
+          </a:lstStyle>
+          <a:p>
+            <a:pPr algn="r"/>
+            <a:fld id="{F7021451-1387-4CA6-816F-3879F97B5CBC}" type="slidenum">
+              <a:rPr b="0" lang="en-US"/>
+              <a:t>30</a:t>
+            </a:fld>
+            <a:endParaRPr lang="en-US"/>
+          </a:p>
+        </p:txBody>
+      </p:sp>
+    </p:spTree>
+  </p:cSld>
+  <p:clrMapOvr>
+    <a:masterClrMapping/>
+  </p:clrMapOvr>
+</p:sld>
+</file>
+
+<file path=ppt/slides/slide31.xml><?xml version="1.0" encoding="utf-8"?>
+<p:sld xmlns:a="http://schemas.openxmlformats.org/drawingml/2006/main" xmlns:r="http://schemas.openxmlformats.org/officeDocument/2006/relationships" xmlns:p="http://schemas.openxmlformats.org/presentationml/2006/main">
+  <p:cSld name="Slide 31">
+    <p:spTree>
+      <p:nvGrpSpPr>
+        <p:cNvPr id="1" name=""/>
+        <p:cNvGrpSpPr/>
+        <p:nvPr/>
+      </p:nvGrpSpPr>
+      <p:grpSpPr>
+        <a:xfrm>
+          <a:off x="0" y="0"/>
+          <a:ext cx="0" cy="0"/>
+          <a:chOff x="0" y="0"/>
+          <a:chExt cx="0" cy="0"/>
+        </a:xfrm>
+      </p:grpSpPr>
+      <p:sp>
+        <p:nvSpPr>
+          <p:cNvPr id="2" name="Text 0"/>
+          <p:cNvSpPr/>
+          <p:nvPr>
+            <p:ph idx="100" type="title" hasCustomPrompt="1"/>
+          </p:nvPr>
+        </p:nvSpPr>
+        <p:spPr>
+          <a:xfrm>
+            <a:off x="457200" y="256032"/>
+            <a:ext cx="8229600" cy="566928"/>
+          </a:xfrm>
+          <a:prstGeom prst="rect">
+            <a:avLst/>
+          </a:prstGeom>
+          <a:noFill/>
+          <a:ln/>
+        </p:spPr>
+        <p:txBody>
+          <a:bodyPr wrap="square" lIns="0" tIns="0" rIns="0" bIns="0" rtlCol="0" anchor="ctr"/>
+          <a:lstStyle/>
+          <a:p>
+            <a:pPr algn="l" indent="0" marL="0">
+              <a:buNone/>
+            </a:pPr>
+            <a:r>
+              <a:rPr lang="en-US" sz="2600" b="1" dirty="0">
+                <a:solidFill>
+                  <a:schemeClr val="tx1"/>
+                </a:solidFill>
+                <a:latin typeface="Cambria" pitchFamily="34" charset="0"/>
+                <a:ea typeface="Cambria" pitchFamily="34" charset="-122"/>
+                <a:cs typeface="Cambria" pitchFamily="34" charset="-120"/>
+              </a:rPr>
+              <a:t>Canopy DB · Devices registry, types, activity</a:t>
+            </a:r>
+            <a:endParaRPr lang="en-US" sz="2600" dirty="0"/>
+          </a:p>
+        </p:txBody>
+      </p:sp>
+      <p:pic>
+        <p:nvPicPr>
+          <p:cNvPr id="3" name="er-9-canopy-devices" descr="er-9-canopy-devices.png">    </p:cNvPr>
+          <p:cNvPicPr>
+            <a:picLocks noChangeAspect="1"/>
+          </p:cNvPicPr>
+          <p:nvPr/>
+        </p:nvPicPr>
+        <p:blipFill>
+          <a:blip r:embed="rId1"/>
+          <a:stretch>
+            <a:fillRect/>
+          </a:stretch>
+        </p:blipFill>
+        <p:spPr>
+          <a:xfrm>
+            <a:off x="2049683" y="868680"/>
+            <a:ext cx="5044634" cy="3886200"/>
+          </a:xfrm>
+          <a:prstGeom prst="rect">
+            <a:avLst/>
+          </a:prstGeom>
+        </p:spPr>
+      </p:pic>
+      <p:sp>
+        <p:nvSpPr>
+          <p:cNvPr id="25" name="Slide Number Placeholder 0"/>
+          <p:cNvSpPr>
+            <a:spLocks noGrp="1"/>
+          </p:cNvSpPr>
+          <p:nvPr>
+            <p:ph type="sldNum" sz="quarter" idx="4294967295"/>
+          </p:nvPr>
+        </p:nvSpPr>
+        <p:spPr>
+          <a:xfrm>
+            <a:off x="8229600" y="4800600"/>
+            <a:ext cx="457200" cy="228600"/>
+          </a:xfrm>
+          <a:prstGeom prst="rect">
+            <a:avLst/>
+          </a:prstGeom>
+          <a:extLst>
+            <a:ext uri="{C572A759-6A51-4108-AA02-DFA0A04FC94B}">
+              <ma14:wrappingTextBoxFlag xmlns:ma14="http://schemas.microsoft.com/office/mac/drawingml/2011/main" val="0"/>
+            </a:ext>
+          </a:extLst>
+        </p:spPr>
+        <p:txBody>
+          <a:bodyPr/>
+          <a:lstStyle>
+            <a:lvl1pPr>
+              <a:defRPr sz="900">
+                <a:solidFill>
+                  <a:schemeClr val="tx2"/>
+                </a:solidFill>
+              </a:defRPr>
+            </a:lvl1pPr>
+          </a:lstStyle>
+          <a:p>
+            <a:pPr algn="r"/>
+            <a:fld id="{F7021451-1387-4CA6-816F-3879F97B5CBC}" type="slidenum">
+              <a:rPr b="0" lang="en-US"/>
+              <a:t>31</a:t>
+            </a:fld>
+            <a:endParaRPr lang="en-US"/>
+          </a:p>
+        </p:txBody>
+      </p:sp>
+    </p:spTree>
+  </p:cSld>
+  <p:clrMapOvr>
+    <a:masterClrMapping/>
+  </p:clrMapOvr>
+</p:sld>
+</file>
+
+<file path=ppt/slides/slide32.xml><?xml version="1.0" encoding="utf-8"?>
+<p:sld xmlns:a="http://schemas.openxmlformats.org/drawingml/2006/main" xmlns:r="http://schemas.openxmlformats.org/officeDocument/2006/relationships" xmlns:p="http://schemas.openxmlformats.org/presentationml/2006/main">
+  <p:cSld name="Slide 32">
+    <p:spTree>
+      <p:nvGrpSpPr>
+        <p:cNvPr id="1" name=""/>
+        <p:cNvGrpSpPr/>
+        <p:nvPr/>
+      </p:nvGrpSpPr>
+      <p:grpSpPr>
+        <a:xfrm>
+          <a:off x="0" y="0"/>
+          <a:ext cx="0" cy="0"/>
+          <a:chOff x="0" y="0"/>
+          <a:chExt cx="0" cy="0"/>
+        </a:xfrm>
+      </p:grpSpPr>
+      <p:sp>
+        <p:nvSpPr>
+          <p:cNvPr id="2" name="Text 0"/>
+          <p:cNvSpPr/>
+          <p:nvPr>
+            <p:ph idx="100" type="title" hasCustomPrompt="1"/>
+          </p:nvPr>
+        </p:nvSpPr>
+        <p:spPr>
+          <a:xfrm>
+            <a:off x="457200" y="256032"/>
+            <a:ext cx="8229600" cy="566928"/>
+          </a:xfrm>
+          <a:prstGeom prst="rect">
+            <a:avLst/>
+          </a:prstGeom>
+          <a:noFill/>
+          <a:ln/>
+        </p:spPr>
+        <p:txBody>
+          <a:bodyPr wrap="square" lIns="0" tIns="0" rIns="0" bIns="0" rtlCol="0" anchor="ctr"/>
+          <a:lstStyle/>
+          <a:p>
+            <a:pPr algn="l" indent="0" marL="0">
+              <a:buNone/>
+            </a:pPr>
+            <a:r>
+              <a:rPr lang="en-US" sz="2600" b="1" dirty="0">
+                <a:solidFill>
+                  <a:schemeClr val="tx1"/>
+                </a:solidFill>
+                <a:latin typeface="Cambria" pitchFamily="34" charset="0"/>
+                <a:ea typeface="Cambria" pitchFamily="34" charset="-122"/>
+                <a:cs typeface="Cambria" pitchFamily="34" charset="-120"/>
+              </a:rPr>
+              <a:t>Haber SQLite · gateway registry and releases</a:t>
+            </a:r>
+            <a:endParaRPr lang="en-US" sz="2600" dirty="0"/>
+          </a:p>
+        </p:txBody>
+      </p:sp>
+      <p:pic>
+        <p:nvPicPr>
+          <p:cNvPr id="3" name="er-6-haber" descr="er-6-haber.png">    </p:cNvPr>
+          <p:cNvPicPr>
+            <a:picLocks noChangeAspect="1"/>
+          </p:cNvPicPr>
+          <p:nvPr/>
+        </p:nvPicPr>
+        <p:blipFill>
+          <a:blip r:embed="rId1"/>
+          <a:stretch>
+            <a:fillRect/>
+          </a:stretch>
+        </p:blipFill>
+        <p:spPr>
+          <a:xfrm>
+            <a:off x="698431" y="868680"/>
+            <a:ext cx="7747138" cy="3886200"/>
+          </a:xfrm>
+          <a:prstGeom prst="rect">
+            <a:avLst/>
+          </a:prstGeom>
+        </p:spPr>
+      </p:pic>
+      <p:sp>
+        <p:nvSpPr>
+          <p:cNvPr id="25" name="Slide Number Placeholder 0"/>
+          <p:cNvSpPr>
+            <a:spLocks noGrp="1"/>
+          </p:cNvSpPr>
+          <p:nvPr>
+            <p:ph type="sldNum" sz="quarter" idx="4294967295"/>
+          </p:nvPr>
+        </p:nvSpPr>
+        <p:spPr>
+          <a:xfrm>
+            <a:off x="8229600" y="4800600"/>
+            <a:ext cx="457200" cy="228600"/>
+          </a:xfrm>
+          <a:prstGeom prst="rect">
+            <a:avLst/>
+          </a:prstGeom>
+          <a:extLst>
+            <a:ext uri="{C572A759-6A51-4108-AA02-DFA0A04FC94B}">
+              <ma14:wrappingTextBoxFlag xmlns:ma14="http://schemas.microsoft.com/office/mac/drawingml/2011/main" val="0"/>
+            </a:ext>
+          </a:extLst>
+        </p:spPr>
+        <p:txBody>
+          <a:bodyPr/>
+          <a:lstStyle>
+            <a:lvl1pPr>
+              <a:defRPr sz="900">
+                <a:solidFill>
+                  <a:schemeClr val="tx2"/>
+                </a:solidFill>
+              </a:defRPr>
+            </a:lvl1pPr>
+          </a:lstStyle>
+          <a:p>
+            <a:pPr algn="r"/>
+            <a:fld id="{F7021451-1387-4CA6-816F-3879F97B5CBC}" type="slidenum">
+              <a:rPr b="0" lang="en-US"/>
+              <a:t>32</a:t>
+            </a:fld>
+            <a:endParaRPr lang="en-US"/>
+          </a:p>
+        </p:txBody>
+      </p:sp>
+    </p:spTree>
+  </p:cSld>
+  <p:clrMapOvr>
+    <a:masterClrMapping/>
+  </p:clrMapOvr>
+</p:sld>
+</file>
+
+<file path=ppt/slides/slide33.xml><?xml version="1.0" encoding="utf-8"?>
+<p:sld xmlns:a="http://schemas.openxmlformats.org/drawingml/2006/main" xmlns:r="http://schemas.openxmlformats.org/officeDocument/2006/relationships" xmlns:p="http://schemas.openxmlformats.org/presentationml/2006/main">
+  <p:cSld name="Slide 33">
+    <p:spTree>
+      <p:nvGrpSpPr>
+        <p:cNvPr id="1" name=""/>
+        <p:cNvGrpSpPr/>
+        <p:nvPr/>
+      </p:nvGrpSpPr>
+      <p:grpSpPr>
+        <a:xfrm>
+          <a:off x="0" y="0"/>
+          <a:ext cx="0" cy="0"/>
+          <a:chOff x="0" y="0"/>
+          <a:chExt cx="0" cy="0"/>
+        </a:xfrm>
+      </p:grpSpPr>
+      <p:sp>
+        <p:nvSpPr>
+          <p:cNvPr id="2" name="Text 0"/>
+          <p:cNvSpPr/>
+          <p:nvPr>
+            <p:ph idx="100" type="title" hasCustomPrompt="1"/>
+          </p:nvPr>
+        </p:nvSpPr>
+        <p:spPr>
+          <a:xfrm>
+            <a:off x="457200" y="256032"/>
+            <a:ext cx="8229600" cy="566928"/>
+          </a:xfrm>
+          <a:prstGeom prst="rect">
+            <a:avLst/>
+          </a:prstGeom>
+          <a:noFill/>
+          <a:ln/>
+        </p:spPr>
+        <p:txBody>
+          <a:bodyPr wrap="square" lIns="0" tIns="0" rIns="0" bIns="0" rtlCol="0" anchor="ctr"/>
+          <a:lstStyle/>
+          <a:p>
+            <a:pPr algn="l" indent="0" marL="0">
+              <a:buNone/>
+            </a:pPr>
+            <a:r>
+              <a:rPr lang="en-US" sz="2600" b="1" dirty="0">
+                <a:solidFill>
+                  <a:schemeClr val="tx1"/>
+                </a:solidFill>
+                <a:latin typeface="Cambria" pitchFamily="34" charset="0"/>
+                <a:ea typeface="Cambria" pitchFamily="34" charset="-122"/>
+                <a:cs typeface="Cambria" pitchFamily="34" charset="-120"/>
+              </a:rPr>
+              <a:t>Kafka topics · message envelopes</a:t>
+            </a:r>
+            <a:endParaRPr lang="en-US" sz="2600" dirty="0"/>
+          </a:p>
+        </p:txBody>
+      </p:sp>
+      <p:pic>
+        <p:nvPicPr>
+          <p:cNvPr id="3" name="er-7-kafka-messages" descr="er-7-kafka-messages.png">    </p:cNvPr>
+          <p:cNvPicPr>
+            <a:picLocks noChangeAspect="1"/>
+          </p:cNvPicPr>
+          <p:nvPr/>
+        </p:nvPicPr>
+        <p:blipFill>
+          <a:blip r:embed="rId1"/>
+          <a:stretch>
+            <a:fillRect/>
+          </a:stretch>
+        </p:blipFill>
+        <p:spPr>
+          <a:xfrm>
+            <a:off x="808738" y="868680"/>
+            <a:ext cx="7526524" cy="3886200"/>
+          </a:xfrm>
+          <a:prstGeom prst="rect">
+            <a:avLst/>
+          </a:prstGeom>
+        </p:spPr>
+      </p:pic>
+      <p:sp>
+        <p:nvSpPr>
+          <p:cNvPr id="25" name="Slide Number Placeholder 0"/>
+          <p:cNvSpPr>
+            <a:spLocks noGrp="1"/>
+          </p:cNvSpPr>
+          <p:nvPr>
+            <p:ph type="sldNum" sz="quarter" idx="4294967295"/>
+          </p:nvPr>
+        </p:nvSpPr>
+        <p:spPr>
+          <a:xfrm>
+            <a:off x="8229600" y="4800600"/>
+            <a:ext cx="457200" cy="228600"/>
+          </a:xfrm>
+          <a:prstGeom prst="rect">
+            <a:avLst/>
+          </a:prstGeom>
+          <a:extLst>
+            <a:ext uri="{C572A759-6A51-4108-AA02-DFA0A04FC94B}">
+              <ma14:wrappingTextBoxFlag xmlns:ma14="http://schemas.microsoft.com/office/mac/drawingml/2011/main" val="0"/>
+            </a:ext>
+          </a:extLst>
+        </p:spPr>
+        <p:txBody>
+          <a:bodyPr/>
+          <a:lstStyle>
+            <a:lvl1pPr>
+              <a:defRPr sz="900">
+                <a:solidFill>
+                  <a:schemeClr val="tx2"/>
+                </a:solidFill>
+              </a:defRPr>
+            </a:lvl1pPr>
+          </a:lstStyle>
+          <a:p>
+            <a:pPr algn="r"/>
+            <a:fld id="{F7021451-1387-4CA6-816F-3879F97B5CBC}" type="slidenum">
+              <a:rPr b="0" lang="en-US"/>
+              <a:t>33</a:t>
+            </a:fld>
+            <a:endParaRPr lang="en-US"/>
+          </a:p>
+        </p:txBody>
+      </p:sp>
+    </p:spTree>
+  </p:cSld>
+  <p:clrMapOvr>
+    <a:masterClrMapping/>
+  </p:clrMapOvr>
+</p:sld>
+</file>
+
+<file path=ppt/slides/slide34.xml><?xml version="1.0" encoding="utf-8"?>
+<p:sld xmlns:a="http://schemas.openxmlformats.org/drawingml/2006/main" xmlns:r="http://schemas.openxmlformats.org/officeDocument/2006/relationships" xmlns:p="http://schemas.openxmlformats.org/presentationml/2006/main">
+  <p:cSld name="Slide 34">
+    <p:spTree>
+      <p:nvGrpSpPr>
+        <p:cNvPr id="1" name=""/>
+        <p:cNvGrpSpPr/>
+        <p:nvPr/>
+      </p:nvGrpSpPr>
+      <p:grpSpPr>
+        <a:xfrm>
+          <a:off x="0" y="0"/>
+          <a:ext cx="0" cy="0"/>
+          <a:chOff x="0" y="0"/>
+          <a:chExt cx="0" cy="0"/>
+        </a:xfrm>
+      </p:grpSpPr>
+      <p:sp>
+        <p:nvSpPr>
+          <p:cNvPr id="2" name="Text 0"/>
+          <p:cNvSpPr/>
+          <p:nvPr>
+            <p:ph idx="100" type="title" hasCustomPrompt="1"/>
+          </p:nvPr>
+        </p:nvSpPr>
+        <p:spPr>
+          <a:xfrm>
+            <a:off x="457200" y="256032"/>
+            <a:ext cx="8229600" cy="566928"/>
+          </a:xfrm>
+          <a:prstGeom prst="rect">
+            <a:avLst/>
+          </a:prstGeom>
+          <a:noFill/>
+          <a:ln/>
+        </p:spPr>
+        <p:txBody>
+          <a:bodyPr wrap="square" lIns="0" tIns="0" rIns="0" bIns="0" rtlCol="0" anchor="ctr"/>
+          <a:lstStyle/>
+          <a:p>
+            <a:pPr algn="l" indent="0" marL="0">
+              <a:buNone/>
+            </a:pPr>
+            <a:r>
+              <a:rPr lang="en-US" sz="2600" b="1" dirty="0">
+                <a:solidFill>
+                  <a:schemeClr val="tx1"/>
+                </a:solidFill>
+                <a:latin typeface="Cambria" pitchFamily="34" charset="0"/>
+                <a:ea typeface="Cambria" pitchFamily="34" charset="-122"/>
+                <a:cs typeface="Cambria" pitchFamily="34" charset="-120"/>
+              </a:rPr>
               <a:t>Network and ports</a:t>
             </a:r>
             <a:endParaRPr lang="en-US" sz="2600" dirty="0"/>
@@ -17130,7 +21267,7 @@
       </p:sp>
       <p:graphicFrame>
         <p:nvGraphicFramePr>
-          <p:cNvPr id="29" name="Table 0"/>
+          <p:cNvPr id="35" name="Table 0"/>
           <p:cNvGraphicFramePr>
             <a:graphicFrameLocks noGrp="1"/>
           </p:cNvGraphicFramePr>
@@ -20082,7 +24219,7 @@
             <a:pPr algn="r"/>
             <a:fld id="{F7021451-1387-4CA6-816F-3879F97B5CBC}" type="slidenum">
               <a:rPr b="0" lang="en-US"/>
-              <a:t>28</a:t>
+              <a:t>34</a:t>
             </a:fld>
             <a:endParaRPr lang="en-US"/>
           </a:p>
@@ -20096,9 +24233,9 @@
 </p:sld>
 </file>
 
-<file path=ppt/slides/slide29.xml><?xml version="1.0" encoding="utf-8"?>
+<file path=ppt/slides/slide35.xml><?xml version="1.0" encoding="utf-8"?>
 <p:sld xmlns:a="http://schemas.openxmlformats.org/drawingml/2006/main" xmlns:r="http://schemas.openxmlformats.org/officeDocument/2006/relationships" xmlns:p="http://schemas.openxmlformats.org/presentationml/2006/main">
-  <p:cSld name="Slide 29">
+  <p:cSld name="Slide 35">
     <p:spTree>
       <p:nvGrpSpPr>
         <p:cNvPr id="1" name=""/>
@@ -20156,7 +24293,7 @@
       </p:sp>
       <p:graphicFrame>
         <p:nvGraphicFramePr>
-          <p:cNvPr id="30" name="Table 0"/>
+          <p:cNvPr id="36" name="Table 0"/>
           <p:cNvGraphicFramePr>
             <a:graphicFrameLocks noGrp="1"/>
           </p:cNvGraphicFramePr>
@@ -22902,7 +27039,7 @@
             <a:pPr algn="r"/>
             <a:fld id="{F7021451-1387-4CA6-816F-3879F97B5CBC}" type="slidenum">
               <a:rPr b="0" lang="en-US"/>
-              <a:t>29</a:t>
+              <a:t>35</a:t>
             </a:fld>
             <a:endParaRPr lang="en-US"/>
           </a:p>
@@ -22916,725 +27053,9 @@
 </p:sld>
 </file>
 
-<file path=ppt/slides/slide3.xml><?xml version="1.0" encoding="utf-8"?>
+<file path=ppt/slides/slide36.xml><?xml version="1.0" encoding="utf-8"?>
 <p:sld xmlns:a="http://schemas.openxmlformats.org/drawingml/2006/main" xmlns:r="http://schemas.openxmlformats.org/officeDocument/2006/relationships" xmlns:p="http://schemas.openxmlformats.org/presentationml/2006/main">
-  <p:cSld name="Slide 3">
-    <p:spTree>
-      <p:nvGrpSpPr>
-        <p:cNvPr id="1" name=""/>
-        <p:cNvGrpSpPr/>
-        <p:nvPr/>
-      </p:nvGrpSpPr>
-      <p:grpSpPr>
-        <a:xfrm>
-          <a:off x="0" y="0"/>
-          <a:ext cx="0" cy="0"/>
-          <a:chOff x="0" y="0"/>
-          <a:chExt cx="0" cy="0"/>
-        </a:xfrm>
-      </p:grpSpPr>
-      <p:sp>
-        <p:nvSpPr>
-          <p:cNvPr id="2" name="Text 0"/>
-          <p:cNvSpPr/>
-          <p:nvPr>
-            <p:ph idx="100" type="title" hasCustomPrompt="1"/>
-          </p:nvPr>
-        </p:nvSpPr>
-        <p:spPr>
-          <a:xfrm>
-            <a:off x="457200" y="256032"/>
-            <a:ext cx="8229600" cy="566928"/>
-          </a:xfrm>
-          <a:prstGeom prst="rect">
-            <a:avLst/>
-          </a:prstGeom>
-          <a:noFill/>
-          <a:ln/>
-        </p:spPr>
-        <p:txBody>
-          <a:bodyPr wrap="square" lIns="0" tIns="0" rIns="0" bIns="0" rtlCol="0" anchor="ctr"/>
-          <a:lstStyle/>
-          <a:p>
-            <a:pPr algn="l" indent="0" marL="0">
-              <a:buNone/>
-            </a:pPr>
-            <a:r>
-              <a:rPr lang="en-US" sz="2600" b="1" dirty="0">
-                <a:solidFill>
-                  <a:schemeClr val="tx1"/>
-                </a:solidFill>
-                <a:latin typeface="Cambria" pitchFamily="34" charset="0"/>
-                <a:ea typeface="Cambria" pitchFamily="34" charset="-122"/>
-                <a:cs typeface="Cambria" pitchFamily="34" charset="-120"/>
-              </a:rPr>
-              <a:t>From device signal to charted observation</a:t>
-            </a:r>
-            <a:endParaRPr lang="en-US" sz="2600" dirty="0"/>
-          </a:p>
-        </p:txBody>
-      </p:sp>
-      <p:sp>
-        <p:nvSpPr>
-          <p:cNvPr id="3" name="icon-dot"/>
-          <p:cNvSpPr/>
-          <p:nvPr/>
-        </p:nvSpPr>
-        <p:spPr>
-          <a:xfrm>
-            <a:off x="548640" y="1051560"/>
-            <a:ext cx="457200" cy="457200"/>
-          </a:xfrm>
-          <a:prstGeom prst="ellipse">
-            <a:avLst/>
-          </a:prstGeom>
-          <a:solidFill>
-            <a:schemeClr val="accent1"/>
-          </a:solidFill>
-          <a:ln w="12700">
-            <a:solidFill>
-              <a:schemeClr val="accent1"/>
-            </a:solidFill>
-            <a:prstDash val="solid"/>
-          </a:ln>
-        </p:spPr>
-      </p:sp>
-      <p:pic>
-        <p:nvPicPr>
-          <p:cNvPr id="4" name="icon" descr="preencoded.png">    </p:cNvPr>
-          <p:cNvPicPr>
-            <a:picLocks noChangeAspect="1"/>
-          </p:cNvPicPr>
-          <p:nvPr/>
-        </p:nvPicPr>
-        <p:blipFill>
-          <a:blip r:embed="rId1"/>
-          <a:stretch>
-            <a:fillRect/>
-          </a:stretch>
-        </p:blipFill>
-        <p:spPr>
-          <a:xfrm>
-            <a:off x="658368" y="1161288"/>
-            <a:ext cx="237744" cy="237744"/>
-          </a:xfrm>
-          <a:prstGeom prst="rect">
-            <a:avLst/>
-          </a:prstGeom>
-        </p:spPr>
-      </p:pic>
-      <p:sp>
-        <p:nvSpPr>
-          <p:cNvPr id="5" name="Text 2"/>
-          <p:cNvSpPr txBox="1"/>
-          <p:nvPr/>
-        </p:nvSpPr>
-        <p:spPr>
-          <a:xfrm>
-            <a:off x="1188720" y="1097280"/>
-            <a:ext cx="1737360" cy="365760"/>
-          </a:xfrm>
-          <a:prstGeom prst="rect">
-            <a:avLst/>
-          </a:prstGeom>
-          <a:noFill/>
-          <a:ln/>
-        </p:spPr>
-        <p:txBody>
-          <a:bodyPr wrap="square" lIns="0" tIns="0" rIns="0" bIns="0" rtlCol="0" anchor="ctr"/>
-          <a:lstStyle/>
-          <a:p>
-            <a:pPr indent="0" marL="0">
-              <a:buNone/>
-            </a:pPr>
-            <a:r>
-              <a:rPr lang="en-US" sz="1700" b="1" dirty="0">
-                <a:solidFill>
-                  <a:schemeClr val="tx1"/>
-                </a:solidFill>
-              </a:rPr>
-              <a:t>Connect</a:t>
-            </a:r>
-            <a:endParaRPr lang="en-US" sz="1700" dirty="0"/>
-          </a:p>
-        </p:txBody>
-      </p:sp>
-      <p:sp>
-        <p:nvSpPr>
-          <p:cNvPr id="6" name="Text 3"/>
-          <p:cNvSpPr txBox="1"/>
-          <p:nvPr/>
-        </p:nvSpPr>
-        <p:spPr>
-          <a:xfrm>
-            <a:off x="2926080" y="1097280"/>
-            <a:ext cx="5760720" cy="365760"/>
-          </a:xfrm>
-          <a:prstGeom prst="rect">
-            <a:avLst/>
-          </a:prstGeom>
-          <a:noFill/>
-          <a:ln/>
-        </p:spPr>
-        <p:txBody>
-          <a:bodyPr wrap="square" lIns="0" tIns="0" rIns="0" bIns="0" rtlCol="0" anchor="ctr"/>
-          <a:lstStyle/>
-          <a:p>
-            <a:pPr indent="0" marL="0">
-              <a:buNone/>
-            </a:pPr>
-            <a:r>
-              <a:rPr lang="en-US" sz="1400" dirty="0">
-                <a:solidFill>
-                  <a:schemeClr val="tx1"/>
-                </a:solidFill>
-              </a:rPr>
-              <a:t>RS-232, HL7 v2 / MLLP, UDP multicast, TCP and HTTP poll / push</a:t>
-            </a:r>
-            <a:endParaRPr lang="en-US" sz="1400" dirty="0"/>
-          </a:p>
-        </p:txBody>
-      </p:sp>
-      <p:sp>
-        <p:nvSpPr>
-          <p:cNvPr id="7" name="icon-dot"/>
-          <p:cNvSpPr/>
-          <p:nvPr/>
-        </p:nvSpPr>
-        <p:spPr>
-          <a:xfrm>
-            <a:off x="548640" y="1783080"/>
-            <a:ext cx="457200" cy="457200"/>
-          </a:xfrm>
-          <a:prstGeom prst="ellipse">
-            <a:avLst/>
-          </a:prstGeom>
-          <a:solidFill>
-            <a:schemeClr val="accent2"/>
-          </a:solidFill>
-          <a:ln w="12700">
-            <a:solidFill>
-              <a:schemeClr val="accent2"/>
-            </a:solidFill>
-            <a:prstDash val="solid"/>
-          </a:ln>
-        </p:spPr>
-      </p:sp>
-      <p:pic>
-        <p:nvPicPr>
-          <p:cNvPr id="8" name="icon" descr="preencoded.png">    </p:cNvPr>
-          <p:cNvPicPr>
-            <a:picLocks noChangeAspect="1"/>
-          </p:cNvPicPr>
-          <p:nvPr/>
-        </p:nvPicPr>
-        <p:blipFill>
-          <a:blip r:embed="rId2"/>
-          <a:stretch>
-            <a:fillRect/>
-          </a:stretch>
-        </p:blipFill>
-        <p:spPr>
-          <a:xfrm>
-            <a:off x="658368" y="1892808"/>
-            <a:ext cx="237744" cy="237744"/>
-          </a:xfrm>
-          <a:prstGeom prst="rect">
-            <a:avLst/>
-          </a:prstGeom>
-        </p:spPr>
-      </p:pic>
-      <p:sp>
-        <p:nvSpPr>
-          <p:cNvPr id="9" name="Text 5"/>
-          <p:cNvSpPr txBox="1"/>
-          <p:nvPr/>
-        </p:nvSpPr>
-        <p:spPr>
-          <a:xfrm>
-            <a:off x="1188720" y="1828800"/>
-            <a:ext cx="1737360" cy="365760"/>
-          </a:xfrm>
-          <a:prstGeom prst="rect">
-            <a:avLst/>
-          </a:prstGeom>
-          <a:noFill/>
-          <a:ln/>
-        </p:spPr>
-        <p:txBody>
-          <a:bodyPr wrap="square" lIns="0" tIns="0" rIns="0" bIns="0" rtlCol="0" anchor="ctr"/>
-          <a:lstStyle/>
-          <a:p>
-            <a:pPr indent="0" marL="0">
-              <a:buNone/>
-            </a:pPr>
-            <a:r>
-              <a:rPr lang="en-US" sz="1700" b="1" dirty="0">
-                <a:solidFill>
-                  <a:schemeClr val="tx1"/>
-                </a:solidFill>
-              </a:rPr>
-              <a:t>Parse</a:t>
-            </a:r>
-            <a:endParaRPr lang="en-US" sz="1700" dirty="0"/>
-          </a:p>
-        </p:txBody>
-      </p:sp>
-      <p:sp>
-        <p:nvSpPr>
-          <p:cNvPr id="10" name="Text 6"/>
-          <p:cNvSpPr txBox="1"/>
-          <p:nvPr/>
-        </p:nvSpPr>
-        <p:spPr>
-          <a:xfrm>
-            <a:off x="2926080" y="1828800"/>
-            <a:ext cx="5760720" cy="365760"/>
-          </a:xfrm>
-          <a:prstGeom prst="rect">
-            <a:avLst/>
-          </a:prstGeom>
-          <a:noFill/>
-          <a:ln/>
-        </p:spPr>
-        <p:txBody>
-          <a:bodyPr wrap="square" lIns="0" tIns="0" rIns="0" bIns="0" rtlCol="0" anchor="ctr"/>
-          <a:lstStyle/>
-          <a:p>
-            <a:pPr indent="0" marL="0">
-              <a:buNone/>
-            </a:pPr>
-            <a:r>
-              <a:rPr lang="en-US" sz="1400" dirty="0">
-                <a:solidFill>
-                  <a:schemeClr val="tx1"/>
-                </a:solidFill>
-              </a:rPr>
-              <a:t>One isolated parser container per device produces Flora observations</a:t>
-            </a:r>
-            <a:endParaRPr lang="en-US" sz="1400" dirty="0"/>
-          </a:p>
-        </p:txBody>
-      </p:sp>
-      <p:sp>
-        <p:nvSpPr>
-          <p:cNvPr id="11" name="icon-dot"/>
-          <p:cNvSpPr/>
-          <p:nvPr/>
-        </p:nvSpPr>
-        <p:spPr>
-          <a:xfrm>
-            <a:off x="548640" y="2514600"/>
-            <a:ext cx="457200" cy="457200"/>
-          </a:xfrm>
-          <a:prstGeom prst="ellipse">
-            <a:avLst/>
-          </a:prstGeom>
-          <a:solidFill>
-            <a:schemeClr val="accent1"/>
-          </a:solidFill>
-          <a:ln w="12700">
-            <a:solidFill>
-              <a:schemeClr val="accent1"/>
-            </a:solidFill>
-            <a:prstDash val="solid"/>
-          </a:ln>
-        </p:spPr>
-      </p:sp>
-      <p:pic>
-        <p:nvPicPr>
-          <p:cNvPr id="12" name="icon" descr="preencoded.png">    </p:cNvPr>
-          <p:cNvPicPr>
-            <a:picLocks noChangeAspect="1"/>
-          </p:cNvPicPr>
-          <p:nvPr/>
-        </p:nvPicPr>
-        <p:blipFill>
-          <a:blip r:embed="rId3"/>
-          <a:stretch>
-            <a:fillRect/>
-          </a:stretch>
-        </p:blipFill>
-        <p:spPr>
-          <a:xfrm>
-            <a:off x="658368" y="2624328"/>
-            <a:ext cx="237744" cy="237744"/>
-          </a:xfrm>
-          <a:prstGeom prst="rect">
-            <a:avLst/>
-          </a:prstGeom>
-        </p:spPr>
-      </p:pic>
-      <p:sp>
-        <p:nvSpPr>
-          <p:cNvPr id="13" name="Text 8"/>
-          <p:cNvSpPr txBox="1"/>
-          <p:nvPr/>
-        </p:nvSpPr>
-        <p:spPr>
-          <a:xfrm>
-            <a:off x="1188720" y="2560320"/>
-            <a:ext cx="1737360" cy="365760"/>
-          </a:xfrm>
-          <a:prstGeom prst="rect">
-            <a:avLst/>
-          </a:prstGeom>
-          <a:noFill/>
-          <a:ln/>
-        </p:spPr>
-        <p:txBody>
-          <a:bodyPr wrap="square" lIns="0" tIns="0" rIns="0" bIns="0" rtlCol="0" anchor="ctr"/>
-          <a:lstStyle/>
-          <a:p>
-            <a:pPr indent="0" marL="0">
-              <a:buNone/>
-            </a:pPr>
-            <a:r>
-              <a:rPr lang="en-US" sz="1700" b="1" dirty="0">
-                <a:solidFill>
-                  <a:schemeClr val="tx1"/>
-                </a:solidFill>
-              </a:rPr>
-              <a:t>Store &amp; serve</a:t>
-            </a:r>
-            <a:endParaRPr lang="en-US" sz="1700" dirty="0"/>
-          </a:p>
-        </p:txBody>
-      </p:sp>
-      <p:sp>
-        <p:nvSpPr>
-          <p:cNvPr id="14" name="Text 9"/>
-          <p:cNvSpPr txBox="1"/>
-          <p:nvPr/>
-        </p:nvSpPr>
-        <p:spPr>
-          <a:xfrm>
-            <a:off x="2926080" y="2560320"/>
-            <a:ext cx="5760720" cy="365760"/>
-          </a:xfrm>
-          <a:prstGeom prst="rect">
-            <a:avLst/>
-          </a:prstGeom>
-          <a:noFill/>
-          <a:ln/>
-        </p:spPr>
-        <p:txBody>
-          <a:bodyPr wrap="square" lIns="0" tIns="0" rIns="0" bIns="0" rtlCol="0" anchor="ctr"/>
-          <a:lstStyle/>
-          <a:p>
-            <a:pPr indent="0" marL="0">
-              <a:buNone/>
-            </a:pPr>
-            <a:r>
-              <a:rPr lang="en-US" sz="1400" dirty="0">
-                <a:solidFill>
-                  <a:schemeClr val="tx1"/>
-                </a:solidFill>
-              </a:rPr>
-              <a:t>Local PostgreSQL store; each Leaf reads its own devices via the data-api</a:t>
-            </a:r>
-            <a:endParaRPr lang="en-US" sz="1400" dirty="0"/>
-          </a:p>
-        </p:txBody>
-      </p:sp>
-      <p:sp>
-        <p:nvSpPr>
-          <p:cNvPr id="15" name="icon-dot"/>
-          <p:cNvSpPr/>
-          <p:nvPr/>
-        </p:nvSpPr>
-        <p:spPr>
-          <a:xfrm>
-            <a:off x="548640" y="3246120"/>
-            <a:ext cx="457200" cy="457200"/>
-          </a:xfrm>
-          <a:prstGeom prst="ellipse">
-            <a:avLst/>
-          </a:prstGeom>
-          <a:solidFill>
-            <a:schemeClr val="accent2"/>
-          </a:solidFill>
-          <a:ln w="12700">
-            <a:solidFill>
-              <a:schemeClr val="accent2"/>
-            </a:solidFill>
-            <a:prstDash val="solid"/>
-          </a:ln>
-        </p:spPr>
-      </p:sp>
-      <p:pic>
-        <p:nvPicPr>
-          <p:cNvPr id="16" name="icon" descr="preencoded.png">    </p:cNvPr>
-          <p:cNvPicPr>
-            <a:picLocks noChangeAspect="1"/>
-          </p:cNvPicPr>
-          <p:nvPr/>
-        </p:nvPicPr>
-        <p:blipFill>
-          <a:blip r:embed="rId4"/>
-          <a:stretch>
-            <a:fillRect/>
-          </a:stretch>
-        </p:blipFill>
-        <p:spPr>
-          <a:xfrm>
-            <a:off x="658368" y="3355848"/>
-            <a:ext cx="237744" cy="237744"/>
-          </a:xfrm>
-          <a:prstGeom prst="rect">
-            <a:avLst/>
-          </a:prstGeom>
-        </p:spPr>
-      </p:pic>
-      <p:sp>
-        <p:nvSpPr>
-          <p:cNvPr id="17" name="Text 11"/>
-          <p:cNvSpPr txBox="1"/>
-          <p:nvPr/>
-        </p:nvSpPr>
-        <p:spPr>
-          <a:xfrm>
-            <a:off x="1188720" y="3291840"/>
-            <a:ext cx="1737360" cy="365760"/>
-          </a:xfrm>
-          <a:prstGeom prst="rect">
-            <a:avLst/>
-          </a:prstGeom>
-          <a:noFill/>
-          <a:ln/>
-        </p:spPr>
-        <p:txBody>
-          <a:bodyPr wrap="square" lIns="0" tIns="0" rIns="0" bIns="0" rtlCol="0" anchor="ctr"/>
-          <a:lstStyle/>
-          <a:p>
-            <a:pPr indent="0" marL="0">
-              <a:buNone/>
-            </a:pPr>
-            <a:r>
-              <a:rPr lang="en-US" sz="1700" b="1" dirty="0">
-                <a:solidFill>
-                  <a:schemeClr val="tx1"/>
-                </a:solidFill>
-              </a:rPr>
-              <a:t>Licence</a:t>
-            </a:r>
-            <a:endParaRPr lang="en-US" sz="1700" dirty="0"/>
-          </a:p>
-        </p:txBody>
-      </p:sp>
-      <p:sp>
-        <p:nvSpPr>
-          <p:cNvPr id="18" name="Text 12"/>
-          <p:cNvSpPr txBox="1"/>
-          <p:nvPr/>
-        </p:nvSpPr>
-        <p:spPr>
-          <a:xfrm>
-            <a:off x="2926080" y="3291840"/>
-            <a:ext cx="5760720" cy="365760"/>
-          </a:xfrm>
-          <a:prstGeom prst="rect">
-            <a:avLst/>
-          </a:prstGeom>
-          <a:noFill/>
-          <a:ln/>
-        </p:spPr>
-        <p:txBody>
-          <a:bodyPr wrap="square" lIns="0" tIns="0" rIns="0" bIns="0" rtlCol="0" anchor="ctr"/>
-          <a:lstStyle/>
-          <a:p>
-            <a:pPr indent="0" marL="0">
-              <a:buNone/>
-            </a:pPr>
-            <a:r>
-              <a:rPr lang="en-US" sz="1400" dirty="0">
-                <a:solidFill>
-                  <a:schemeClr val="tx1"/>
-                </a:solidFill>
-              </a:rPr>
-              <a:t>Device licence, catalogue and parser images come from Haber in Canopy</a:t>
-            </a:r>
-            <a:endParaRPr lang="en-US" sz="1400" dirty="0"/>
-          </a:p>
-        </p:txBody>
-      </p:sp>
-      <p:sp>
-        <p:nvSpPr>
-          <p:cNvPr id="19" name="icon-dot"/>
-          <p:cNvSpPr/>
-          <p:nvPr/>
-        </p:nvSpPr>
-        <p:spPr>
-          <a:xfrm>
-            <a:off x="548640" y="3977640"/>
-            <a:ext cx="457200" cy="457200"/>
-          </a:xfrm>
-          <a:prstGeom prst="ellipse">
-            <a:avLst/>
-          </a:prstGeom>
-          <a:solidFill>
-            <a:schemeClr val="accent1"/>
-          </a:solidFill>
-          <a:ln w="12700">
-            <a:solidFill>
-              <a:schemeClr val="accent1"/>
-            </a:solidFill>
-            <a:prstDash val="solid"/>
-          </a:ln>
-        </p:spPr>
-      </p:sp>
-      <p:pic>
-        <p:nvPicPr>
-          <p:cNvPr id="20" name="icon" descr="preencoded.png">    </p:cNvPr>
-          <p:cNvPicPr>
-            <a:picLocks noChangeAspect="1"/>
-          </p:cNvPicPr>
-          <p:nvPr/>
-        </p:nvPicPr>
-        <p:blipFill>
-          <a:blip r:embed="rId5"/>
-          <a:stretch>
-            <a:fillRect/>
-          </a:stretch>
-        </p:blipFill>
-        <p:spPr>
-          <a:xfrm>
-            <a:off x="658368" y="4087368"/>
-            <a:ext cx="237744" cy="237744"/>
-          </a:xfrm>
-          <a:prstGeom prst="rect">
-            <a:avLst/>
-          </a:prstGeom>
-        </p:spPr>
-      </p:pic>
-      <p:sp>
-        <p:nvSpPr>
-          <p:cNvPr id="21" name="Text 14"/>
-          <p:cNvSpPr txBox="1"/>
-          <p:nvPr/>
-        </p:nvSpPr>
-        <p:spPr>
-          <a:xfrm>
-            <a:off x="1188720" y="4023360"/>
-            <a:ext cx="1737360" cy="365760"/>
-          </a:xfrm>
-          <a:prstGeom prst="rect">
-            <a:avLst/>
-          </a:prstGeom>
-          <a:noFill/>
-          <a:ln/>
-        </p:spPr>
-        <p:txBody>
-          <a:bodyPr wrap="square" lIns="0" tIns="0" rIns="0" bIns="0" rtlCol="0" anchor="ctr"/>
-          <a:lstStyle/>
-          <a:p>
-            <a:pPr indent="0" marL="0">
-              <a:buNone/>
-            </a:pPr>
-            <a:r>
-              <a:rPr lang="en-US" sz="1700" b="1" dirty="0">
-                <a:solidFill>
-                  <a:schemeClr val="tx1"/>
-                </a:solidFill>
-              </a:rPr>
-              <a:t>Watch</a:t>
-            </a:r>
-            <a:endParaRPr lang="en-US" sz="1700" dirty="0"/>
-          </a:p>
-        </p:txBody>
-      </p:sp>
-      <p:sp>
-        <p:nvSpPr>
-          <p:cNvPr id="22" name="Text 15"/>
-          <p:cNvSpPr txBox="1"/>
-          <p:nvPr/>
-        </p:nvSpPr>
-        <p:spPr>
-          <a:xfrm>
-            <a:off x="2926080" y="4023360"/>
-            <a:ext cx="5760720" cy="365760"/>
-          </a:xfrm>
-          <a:prstGeom prst="rect">
-            <a:avLst/>
-          </a:prstGeom>
-          <a:noFill/>
-          <a:ln/>
-        </p:spPr>
-        <p:txBody>
-          <a:bodyPr wrap="square" lIns="0" tIns="0" rIns="0" bIns="0" rtlCol="0" anchor="ctr"/>
-          <a:lstStyle/>
-          <a:p>
-            <a:pPr indent="0" marL="0">
-              <a:buNone/>
-            </a:pPr>
-            <a:r>
-              <a:rPr lang="en-US" sz="1400" dirty="0">
-                <a:solidFill>
-                  <a:schemeClr val="tx1"/>
-                </a:solidFill>
-              </a:rPr>
-              <a:t>Status history for every lane, alerts pushed to Canopy</a:t>
-            </a:r>
-            <a:endParaRPr lang="en-US" sz="1400" dirty="0"/>
-          </a:p>
-        </p:txBody>
-      </p:sp>
-      <p:sp>
-        <p:nvSpPr>
-          <p:cNvPr id="25" name="Slide Number Placeholder 0"/>
-          <p:cNvSpPr>
-            <a:spLocks noGrp="1"/>
-          </p:cNvSpPr>
-          <p:nvPr>
-            <p:ph type="sldNum" sz="quarter" idx="4294967295"/>
-          </p:nvPr>
-        </p:nvSpPr>
-        <p:spPr>
-          <a:xfrm>
-            <a:off x="8229600" y="4800600"/>
-            <a:ext cx="457200" cy="228600"/>
-          </a:xfrm>
-          <a:prstGeom prst="rect">
-            <a:avLst/>
-          </a:prstGeom>
-          <a:extLst>
-            <a:ext uri="{C572A759-6A51-4108-AA02-DFA0A04FC94B}">
-              <ma14:wrappingTextBoxFlag xmlns:ma14="http://schemas.microsoft.com/office/mac/drawingml/2011/main" val="0"/>
-            </a:ext>
-          </a:extLst>
-        </p:spPr>
-        <p:txBody>
-          <a:bodyPr/>
-          <a:lstStyle>
-            <a:lvl1pPr>
-              <a:defRPr sz="900">
-                <a:solidFill>
-                  <a:schemeClr val="tx2"/>
-                </a:solidFill>
-              </a:defRPr>
-            </a:lvl1pPr>
-          </a:lstStyle>
-          <a:p>
-            <a:pPr algn="r"/>
-            <a:fld id="{F7021451-1387-4CA6-816F-3879F97B5CBC}" type="slidenum">
-              <a:rPr b="0" lang="en-US"/>
-              <a:t>3</a:t>
-            </a:fld>
-            <a:endParaRPr lang="en-US"/>
-          </a:p>
-        </p:txBody>
-      </p:sp>
-    </p:spTree>
-  </p:cSld>
-  <p:clrMapOvr>
-    <a:masterClrMapping/>
-  </p:clrMapOvr>
-</p:sld>
-</file>
-
-<file path=ppt/slides/slide30.xml><?xml version="1.0" encoding="utf-8"?>
-<p:sld xmlns:a="http://schemas.openxmlformats.org/drawingml/2006/main" xmlns:r="http://schemas.openxmlformats.org/officeDocument/2006/relationships" xmlns:p="http://schemas.openxmlformats.org/presentationml/2006/main">
-  <p:cSld name="Slide 30">
+  <p:cSld name="Slide 36">
     <p:spTree>
       <p:nvGrpSpPr>
         <p:cNvPr id="1" name=""/>
@@ -24348,7 +27769,7 @@
             <a:pPr algn="r"/>
             <a:fld id="{F7021451-1387-4CA6-816F-3879F97B5CBC}" type="slidenum">
               <a:rPr b="0" lang="en-US"/>
-              <a:t>30</a:t>
+              <a:t>36</a:t>
             </a:fld>
             <a:endParaRPr lang="en-US"/>
           </a:p>
@@ -24362,9 +27783,9 @@
 </p:sld>
 </file>
 
-<file path=ppt/slides/slide31.xml><?xml version="1.0" encoding="utf-8"?>
+<file path=ppt/slides/slide37.xml><?xml version="1.0" encoding="utf-8"?>
 <p:sld xmlns:a="http://schemas.openxmlformats.org/drawingml/2006/main" xmlns:r="http://schemas.openxmlformats.org/officeDocument/2006/relationships" xmlns:p="http://schemas.openxmlformats.org/presentationml/2006/main">
-  <p:cSld name="Slide 31">
+  <p:cSld name="Slide 37">
     <p:spTree>
       <p:nvGrpSpPr>
         <p:cNvPr id="1" name=""/>
@@ -24422,7 +27843,7 @@
       </p:sp>
       <p:graphicFrame>
         <p:nvGraphicFramePr>
-          <p:cNvPr id="32" name="Table 0"/>
+          <p:cNvPr id="38" name="Table 0"/>
           <p:cNvGraphicFramePr>
             <a:graphicFrameLocks noGrp="1"/>
           </p:cNvGraphicFramePr>
@@ -25731,7 +29152,7 @@
             <a:pPr algn="r"/>
             <a:fld id="{F7021451-1387-4CA6-816F-3879F97B5CBC}" type="slidenum">
               <a:rPr b="0" lang="en-US"/>
-              <a:t>31</a:t>
+              <a:t>37</a:t>
             </a:fld>
             <a:endParaRPr lang="en-US"/>
           </a:p>
@@ -25745,9 +29166,9 @@
 </p:sld>
 </file>
 
-<file path=ppt/slides/slide32.xml><?xml version="1.0" encoding="utf-8"?>
+<file path=ppt/slides/slide38.xml><?xml version="1.0" encoding="utf-8"?>
 <p:sld xmlns:a="http://schemas.openxmlformats.org/drawingml/2006/main" xmlns:r="http://schemas.openxmlformats.org/officeDocument/2006/relationships" xmlns:p="http://schemas.openxmlformats.org/presentationml/2006/main">
-  <p:cSld name="Slide 32">
+  <p:cSld name="Slide 38">
     <p:spTree>
       <p:nvGrpSpPr>
         <p:cNvPr id="1" name=""/>
